--- a/OA System.pptx
+++ b/OA System.pptx
@@ -9,6 +9,14 @@
     <p:sldId id="258" r:id="rId4"/>
     <p:sldId id="257" r:id="rId5"/>
     <p:sldId id="259" r:id="rId6"/>
+    <p:sldId id="261" r:id="rId7"/>
+    <p:sldId id="262" r:id="rId8"/>
+    <p:sldId id="263" r:id="rId9"/>
+    <p:sldId id="264" r:id="rId10"/>
+    <p:sldId id="265" r:id="rId11"/>
+    <p:sldId id="266" r:id="rId12"/>
+    <p:sldId id="267" r:id="rId13"/>
+    <p:sldId id="268" r:id="rId14"/>
   </p:sldIdLst>
   <p:sldSz cx="12192000" cy="6858000"/>
   <p:notesSz cx="6858000" cy="9144000"/>
@@ -115,7 +123,7 @@
             <a:srgbClr val="A4A3A4"/>
           </p15:clr>
         </p15:guide>
-        <p15:guide id="2" pos="3840" userDrawn="1">
+        <p15:guide id="2" pos="3826" userDrawn="1">
           <p15:clr>
             <a:srgbClr val="A4A3A4"/>
           </p15:clr>
@@ -3143,6 +3151,1217 @@
 </p:sld>
 </file>
 
+<file path=ppt/slides/slide10.xml><?xml version="1.0" encoding="utf-8"?>
+<p:sld xmlns:a="http://schemas.openxmlformats.org/drawingml/2006/main" xmlns:r="http://schemas.openxmlformats.org/officeDocument/2006/relationships" xmlns:p="http://schemas.openxmlformats.org/presentationml/2006/main">
+  <p:cSld>
+    <p:spTree>
+      <p:nvGrpSpPr>
+        <p:cNvPr id="1" name=""/>
+        <p:cNvGrpSpPr/>
+        <p:nvPr/>
+      </p:nvGrpSpPr>
+      <p:grpSpPr/>
+      <p:sp>
+        <p:nvSpPr>
+          <p:cNvPr id="2" name="标题 1"/>
+          <p:cNvSpPr>
+            <a:spLocks noGrp="1"/>
+          </p:cNvSpPr>
+          <p:nvPr>
+            <p:ph type="title"/>
+          </p:nvPr>
+        </p:nvSpPr>
+        <p:spPr/>
+        <p:txBody>
+          <a:bodyPr>
+            <a:normAutofit fontScale="90000"/>
+          </a:bodyPr>
+          <a:p>
+            <a:r>
+              <a:rPr lang="en-US" altLang="zh-CN"/>
+              <a:t>Wireframes</a:t>
+            </a:r>
+            <a:r>
+              <a:rPr lang="zh-CN" altLang="en-US"/>
+              <a:t>（</a:t>
+            </a:r>
+            <a:r>
+              <a:rPr lang="en-US" altLang="zh-CN"/>
+              <a:t>Approval List / Management View</a:t>
+            </a:r>
+            <a:r>
+              <a:rPr lang="zh-CN" altLang="en-US"/>
+              <a:t>）</a:t>
+            </a:r>
+            <a:endParaRPr lang="zh-CN" altLang="en-US"/>
+          </a:p>
+        </p:txBody>
+      </p:sp>
+    </p:spTree>
+    <p:custDataLst>
+      <p:tags r:id="rId1"/>
+    </p:custDataLst>
+  </p:cSld>
+  <p:clrMapOvr>
+    <a:masterClrMapping/>
+  </p:clrMapOvr>
+</p:sld>
+</file>
+
+<file path=ppt/slides/slide11.xml><?xml version="1.0" encoding="utf-8"?>
+<p:sld xmlns:a="http://schemas.openxmlformats.org/drawingml/2006/main" xmlns:r="http://schemas.openxmlformats.org/officeDocument/2006/relationships" xmlns:p="http://schemas.openxmlformats.org/presentationml/2006/main">
+  <p:cSld>
+    <p:spTree>
+      <p:nvGrpSpPr>
+        <p:cNvPr id="1" name=""/>
+        <p:cNvGrpSpPr/>
+        <p:nvPr/>
+      </p:nvGrpSpPr>
+      <p:grpSpPr/>
+      <p:sp>
+        <p:nvSpPr>
+          <p:cNvPr id="2" name="标题 1"/>
+          <p:cNvSpPr>
+            <a:spLocks noGrp="1"/>
+          </p:cNvSpPr>
+          <p:nvPr>
+            <p:ph type="title"/>
+          </p:nvPr>
+        </p:nvSpPr>
+        <p:spPr/>
+        <p:txBody>
+          <a:bodyPr/>
+          <a:p>
+            <a:r>
+              <a:rPr lang="en-US" altLang="zh-CN"/>
+              <a:t>Accessibility Plan (WCAG 2.2)</a:t>
+            </a:r>
+            <a:endParaRPr lang="en-US" altLang="zh-CN"/>
+          </a:p>
+        </p:txBody>
+      </p:sp>
+      <p:sp>
+        <p:nvSpPr>
+          <p:cNvPr id="3" name="内容占位符 2"/>
+          <p:cNvSpPr>
+            <a:spLocks noGrp="1"/>
+          </p:cNvSpPr>
+          <p:nvPr>
+            <p:ph idx="1"/>
+          </p:nvPr>
+        </p:nvSpPr>
+        <p:spPr/>
+        <p:txBody>
+          <a:bodyPr>
+            <a:noAutofit/>
+          </a:bodyPr>
+          <a:p>
+            <a:pPr marL="0" indent="0">
+              <a:lnSpc>
+                <a:spcPct val="100000"/>
+              </a:lnSpc>
+              <a:buNone/>
+            </a:pPr>
+            <a:r>
+              <a:rPr lang="en-US" altLang="zh-CN" sz="1400" b="1">
+                <a:latin typeface="Times New Roman" panose="02020603050405020304" charset="0"/>
+                <a:cs typeface="Times New Roman" panose="02020603050405020304" charset="0"/>
+              </a:rPr>
+              <a:t>1.4.3 Contrast (Minimum)</a:t>
+            </a:r>
+            <a:endParaRPr lang="en-US" altLang="zh-CN" sz="1400" b="1">
+              <a:latin typeface="Times New Roman" panose="02020603050405020304" charset="0"/>
+              <a:cs typeface="Times New Roman" panose="02020603050405020304" charset="0"/>
+            </a:endParaRPr>
+          </a:p>
+          <a:p>
+            <a:pPr marL="0" indent="0">
+              <a:lnSpc>
+                <a:spcPct val="100000"/>
+              </a:lnSpc>
+              <a:buNone/>
+            </a:pPr>
+            <a:r>
+              <a:rPr lang="en-US" altLang="zh-CN" sz="1400" b="1">
+                <a:latin typeface="Times New Roman" panose="02020603050405020304" charset="0"/>
+                <a:cs typeface="Times New Roman" panose="02020603050405020304" charset="0"/>
+              </a:rPr>
+              <a:t>Application: We will ensure a contrast ratio of at least 4.5:1 for all text on the Dashboard and Leave Application forms to make content readable for users with visual impairments.</a:t>
+            </a:r>
+            <a:endParaRPr lang="en-US" altLang="zh-CN" sz="1400" b="1">
+              <a:latin typeface="Times New Roman" panose="02020603050405020304" charset="0"/>
+              <a:cs typeface="Times New Roman" panose="02020603050405020304" charset="0"/>
+            </a:endParaRPr>
+          </a:p>
+          <a:p>
+            <a:pPr marL="0" indent="0">
+              <a:lnSpc>
+                <a:spcPct val="100000"/>
+              </a:lnSpc>
+              <a:buNone/>
+            </a:pPr>
+            <a:r>
+              <a:rPr lang="en-US" altLang="zh-CN" sz="1400" b="1">
+                <a:latin typeface="Times New Roman" panose="02020603050405020304" charset="0"/>
+                <a:cs typeface="Times New Roman" panose="02020603050405020304" charset="0"/>
+              </a:rPr>
+              <a:t>2.1.1 Keyboard</a:t>
+            </a:r>
+            <a:endParaRPr lang="en-US" altLang="zh-CN" sz="1400" b="1">
+              <a:latin typeface="Times New Roman" panose="02020603050405020304" charset="0"/>
+              <a:cs typeface="Times New Roman" panose="02020603050405020304" charset="0"/>
+            </a:endParaRPr>
+          </a:p>
+          <a:p>
+            <a:pPr marL="0" indent="0">
+              <a:lnSpc>
+                <a:spcPct val="100000"/>
+              </a:lnSpc>
+              <a:buNone/>
+            </a:pPr>
+            <a:r>
+              <a:rPr lang="en-US" altLang="zh-CN" sz="1400" b="1">
+                <a:latin typeface="Times New Roman" panose="02020603050405020304" charset="0"/>
+                <a:cs typeface="Times New Roman" panose="02020603050405020304" charset="0"/>
+              </a:rPr>
+              <a:t>Application: All functionality, including navigating the sidebar menu and submitting the leave request form, will be operable through a keyboard interface for users who cannot use a mouse.</a:t>
+            </a:r>
+            <a:endParaRPr lang="en-US" altLang="zh-CN" sz="1400" b="1">
+              <a:latin typeface="Times New Roman" panose="02020603050405020304" charset="0"/>
+              <a:cs typeface="Times New Roman" panose="02020603050405020304" charset="0"/>
+            </a:endParaRPr>
+          </a:p>
+          <a:p>
+            <a:pPr marL="0" indent="0">
+              <a:lnSpc>
+                <a:spcPct val="100000"/>
+              </a:lnSpc>
+              <a:buNone/>
+            </a:pPr>
+            <a:r>
+              <a:rPr lang="en-US" altLang="zh-CN" sz="1400" b="1">
+                <a:latin typeface="Times New Roman" panose="02020603050405020304" charset="0"/>
+                <a:cs typeface="Times New Roman" panose="02020603050405020304" charset="0"/>
+              </a:rPr>
+              <a:t>2.4.7 Focus Visible</a:t>
+            </a:r>
+            <a:endParaRPr lang="en-US" altLang="zh-CN" sz="1400" b="1">
+              <a:latin typeface="Times New Roman" panose="02020603050405020304" charset="0"/>
+              <a:cs typeface="Times New Roman" panose="02020603050405020304" charset="0"/>
+            </a:endParaRPr>
+          </a:p>
+          <a:p>
+            <a:pPr marL="0" indent="0">
+              <a:lnSpc>
+                <a:spcPct val="100000"/>
+              </a:lnSpc>
+              <a:buNone/>
+            </a:pPr>
+            <a:r>
+              <a:rPr lang="en-US" altLang="zh-CN" sz="1400" b="1">
+                <a:latin typeface="Times New Roman" panose="02020603050405020304" charset="0"/>
+                <a:cs typeface="Times New Roman" panose="02020603050405020304" charset="0"/>
+              </a:rPr>
+              <a:t>Application: The system will provide a highly visible focus indicator (e.g., a thick border) on the currently selected input field or button, helping keyboard users know where they are on the page.</a:t>
+            </a:r>
+            <a:endParaRPr lang="en-US" altLang="zh-CN" sz="1400" b="1">
+              <a:latin typeface="Times New Roman" panose="02020603050405020304" charset="0"/>
+              <a:cs typeface="Times New Roman" panose="02020603050405020304" charset="0"/>
+            </a:endParaRPr>
+          </a:p>
+          <a:p>
+            <a:pPr marL="0" indent="0">
+              <a:lnSpc>
+                <a:spcPct val="100000"/>
+              </a:lnSpc>
+              <a:buNone/>
+            </a:pPr>
+            <a:r>
+              <a:rPr lang="en-US" altLang="zh-CN" sz="1400" b="1">
+                <a:latin typeface="Times New Roman" panose="02020603050405020304" charset="0"/>
+                <a:cs typeface="Times New Roman" panose="02020603050405020304" charset="0"/>
+              </a:rPr>
+              <a:t>3.3.2 Labels or Instructions</a:t>
+            </a:r>
+            <a:endParaRPr lang="en-US" altLang="zh-CN" sz="1400" b="1">
+              <a:latin typeface="Times New Roman" panose="02020603050405020304" charset="0"/>
+              <a:cs typeface="Times New Roman" panose="02020603050405020304" charset="0"/>
+            </a:endParaRPr>
+          </a:p>
+          <a:p>
+            <a:pPr marL="0" indent="0">
+              <a:lnSpc>
+                <a:spcPct val="100000"/>
+              </a:lnSpc>
+              <a:buNone/>
+            </a:pPr>
+            <a:r>
+              <a:rPr lang="en-US" altLang="zh-CN" sz="1400" b="1">
+                <a:latin typeface="Times New Roman" panose="02020603050405020304" charset="0"/>
+                <a:cs typeface="Times New Roman" panose="02020603050405020304" charset="0"/>
+              </a:rPr>
+              <a:t>Application: Every input field in the login and application forms will have a clear, descriptive label (e.g., "Start Date", "Reason") to assist users in inputting data correctly.</a:t>
+            </a:r>
+            <a:endParaRPr lang="en-US" altLang="zh-CN" sz="1400" b="1">
+              <a:latin typeface="Times New Roman" panose="02020603050405020304" charset="0"/>
+              <a:cs typeface="Times New Roman" panose="02020603050405020304" charset="0"/>
+            </a:endParaRPr>
+          </a:p>
+          <a:p>
+            <a:pPr marL="0" indent="0">
+              <a:lnSpc>
+                <a:spcPct val="100000"/>
+              </a:lnSpc>
+              <a:buNone/>
+            </a:pPr>
+            <a:r>
+              <a:rPr lang="en-US" altLang="zh-CN" sz="1400" b="1">
+                <a:latin typeface="Times New Roman" panose="02020603050405020304" charset="0"/>
+                <a:cs typeface="Times New Roman" panose="02020603050405020304" charset="0"/>
+              </a:rPr>
+              <a:t>3.3.1 Error Identification</a:t>
+            </a:r>
+            <a:endParaRPr lang="en-US" altLang="zh-CN" sz="1400" b="1">
+              <a:latin typeface="Times New Roman" panose="02020603050405020304" charset="0"/>
+              <a:cs typeface="Times New Roman" panose="02020603050405020304" charset="0"/>
+            </a:endParaRPr>
+          </a:p>
+          <a:p>
+            <a:pPr marL="0" indent="0">
+              <a:lnSpc>
+                <a:spcPct val="100000"/>
+              </a:lnSpc>
+              <a:buNone/>
+            </a:pPr>
+            <a:r>
+              <a:rPr lang="en-US" altLang="zh-CN" sz="1400" b="1">
+                <a:latin typeface="Times New Roman" panose="02020603050405020304" charset="0"/>
+                <a:cs typeface="Times New Roman" panose="02020603050405020304" charset="0"/>
+              </a:rPr>
+              <a:t>Application: If a user submits an empty form or invalid date format, the system will identify the specific item that is in error and describe the error in text (e.g., "End date cannot be before Start date").</a:t>
+            </a:r>
+            <a:endParaRPr lang="en-US" altLang="zh-CN" sz="1400" b="1">
+              <a:latin typeface="Times New Roman" panose="02020603050405020304" charset="0"/>
+              <a:cs typeface="Times New Roman" panose="02020603050405020304" charset="0"/>
+            </a:endParaRPr>
+          </a:p>
+        </p:txBody>
+      </p:sp>
+    </p:spTree>
+    <p:custDataLst>
+      <p:tags r:id="rId1"/>
+    </p:custDataLst>
+  </p:cSld>
+  <p:clrMapOvr>
+    <a:masterClrMapping/>
+  </p:clrMapOvr>
+</p:sld>
+</file>
+
+<file path=ppt/slides/slide12.xml><?xml version="1.0" encoding="utf-8"?>
+<p:sld xmlns:a="http://schemas.openxmlformats.org/drawingml/2006/main" xmlns:r="http://schemas.openxmlformats.org/officeDocument/2006/relationships" xmlns:p="http://schemas.openxmlformats.org/presentationml/2006/main">
+  <p:cSld>
+    <p:spTree>
+      <p:nvGrpSpPr>
+        <p:cNvPr id="1" name=""/>
+        <p:cNvGrpSpPr/>
+        <p:nvPr/>
+      </p:nvGrpSpPr>
+      <p:grpSpPr/>
+      <p:sp>
+        <p:nvSpPr>
+          <p:cNvPr id="2" name="标题 1"/>
+          <p:cNvSpPr>
+            <a:spLocks noGrp="1"/>
+          </p:cNvSpPr>
+          <p:nvPr>
+            <p:ph type="title"/>
+          </p:nvPr>
+        </p:nvSpPr>
+        <p:spPr/>
+        <p:txBody>
+          <a:bodyPr/>
+          <a:p>
+            <a:r>
+              <a:rPr lang="en-US" altLang="zh-CN"/>
+              <a:t>Appendix: Contributions &amp; AI Statement</a:t>
+            </a:r>
+            <a:endParaRPr lang="en-US" altLang="zh-CN"/>
+          </a:p>
+        </p:txBody>
+      </p:sp>
+      <p:sp>
+        <p:nvSpPr>
+          <p:cNvPr id="3" name="内容占位符 2"/>
+          <p:cNvSpPr>
+            <a:spLocks noGrp="1"/>
+          </p:cNvSpPr>
+          <p:nvPr>
+            <p:ph idx="1"/>
+          </p:nvPr>
+        </p:nvSpPr>
+        <p:spPr/>
+        <p:txBody>
+          <a:bodyPr/>
+          <a:p>
+            <a:r>
+              <a:rPr lang="en-US" altLang="zh-CN"/>
+              <a:t>Team Member Contributions</a:t>
+            </a:r>
+            <a:endParaRPr lang="en-US" altLang="zh-CN"/>
+          </a:p>
+          <a:p>
+            <a:endParaRPr lang="en-US" altLang="zh-CN"/>
+          </a:p>
+        </p:txBody>
+      </p:sp>
+      <p:graphicFrame>
+        <p:nvGraphicFramePr>
+          <p:cNvPr id="4" name="表格 3"/>
+          <p:cNvGraphicFramePr/>
+          <p:nvPr>
+            <p:custDataLst>
+              <p:tags r:id="rId1"/>
+            </p:custDataLst>
+          </p:nvPr>
+        </p:nvGraphicFramePr>
+        <p:xfrm>
+          <a:off x="853440" y="1945005"/>
+          <a:ext cx="10485120" cy="1696720"/>
+        </p:xfrm>
+        <a:graphic>
+          <a:graphicData uri="http://schemas.openxmlformats.org/drawingml/2006/table">
+            <a:tbl>
+              <a:tblPr/>
+              <a:tblGrid>
+                <a:gridCol w="3495040"/>
+                <a:gridCol w="3495040"/>
+                <a:gridCol w="3495040"/>
+              </a:tblGrid>
+              <a:tr h="242570">
+                <a:tc>
+                  <a:txBody>
+                    <a:bodyPr/>
+                    <a:p>
+                      <a:pPr>
+                        <a:spcBef>
+                          <a:spcPct val="0"/>
+                        </a:spcBef>
+                        <a:spcAft>
+                          <a:spcPct val="0"/>
+                        </a:spcAft>
+                      </a:pPr>
+                      <a:r>
+                        <a:rPr lang="en-US" altLang="zh-CN" sz="1200">
+                          <a:latin typeface="Times New Roman" panose="02020603050405020304" charset="0"/>
+                          <a:ea typeface="Google Sans Text"/>
+                          <a:cs typeface="Times New Roman" panose="02020603050405020304" charset="0"/>
+                        </a:rPr>
+                        <a:t>Student Name</a:t>
+                      </a:r>
+                      <a:endParaRPr lang="en-US" altLang="zh-CN" sz="1200">
+                        <a:latin typeface="Times New Roman" panose="02020603050405020304" charset="0"/>
+                        <a:ea typeface="Google Sans Text"/>
+                        <a:cs typeface="Times New Roman" panose="02020603050405020304" charset="0"/>
+                      </a:endParaRPr>
+                    </a:p>
+                  </a:txBody>
+                  <a:tcPr marL="0" marR="0" marT="0" marB="0" anchor="ctr" anchorCtr="0">
+                    <a:lnL w="6350" cap="flat" cmpd="sng">
+                      <a:solidFill>
+                        <a:srgbClr val="000000"/>
+                      </a:solidFill>
+                      <a:prstDash val="solid"/>
+                      <a:headEnd type="none" w="med" len="med"/>
+                      <a:tailEnd type="none" w="med" len="med"/>
+                    </a:lnL>
+                    <a:lnR w="6350" cap="flat" cmpd="sng">
+                      <a:solidFill>
+                        <a:srgbClr val="000000"/>
+                      </a:solidFill>
+                      <a:prstDash val="solid"/>
+                      <a:headEnd type="none" w="med" len="med"/>
+                      <a:tailEnd type="none" w="med" len="med"/>
+                    </a:lnR>
+                    <a:lnT w="6350" cap="flat" cmpd="sng">
+                      <a:solidFill>
+                        <a:srgbClr val="000000"/>
+                      </a:solidFill>
+                      <a:prstDash val="solid"/>
+                      <a:headEnd type="none" w="med" len="med"/>
+                      <a:tailEnd type="none" w="med" len="med"/>
+                    </a:lnT>
+                    <a:lnB w="6350" cap="flat" cmpd="sng">
+                      <a:solidFill>
+                        <a:srgbClr val="000000"/>
+                      </a:solidFill>
+                      <a:prstDash val="solid"/>
+                      <a:headEnd type="none" w="med" len="med"/>
+                      <a:tailEnd type="none" w="med" len="med"/>
+                    </a:lnB>
+                    <a:noFill/>
+                  </a:tcPr>
+                </a:tc>
+                <a:tc>
+                  <a:txBody>
+                    <a:bodyPr/>
+                    <a:p>
+                      <a:pPr>
+                        <a:spcBef>
+                          <a:spcPct val="0"/>
+                        </a:spcBef>
+                        <a:spcAft>
+                          <a:spcPct val="0"/>
+                        </a:spcAft>
+                      </a:pPr>
+                      <a:r>
+                        <a:rPr lang="en-US" altLang="zh-CN" sz="1200">
+                          <a:latin typeface="Times New Roman" panose="02020603050405020304" charset="0"/>
+                          <a:ea typeface="Google Sans Text"/>
+                          <a:cs typeface="Times New Roman" panose="02020603050405020304" charset="0"/>
+                        </a:rPr>
+                        <a:t>Contribution %</a:t>
+                      </a:r>
+                      <a:endParaRPr lang="en-US" altLang="zh-CN" sz="1200">
+                        <a:latin typeface="Times New Roman" panose="02020603050405020304" charset="0"/>
+                        <a:ea typeface="Google Sans Text"/>
+                        <a:cs typeface="Times New Roman" panose="02020603050405020304" charset="0"/>
+                      </a:endParaRPr>
+                    </a:p>
+                  </a:txBody>
+                  <a:tcPr marL="0" marR="0" marT="0" marB="0" anchor="ctr" anchorCtr="0">
+                    <a:lnL w="6350" cap="flat" cmpd="sng">
+                      <a:solidFill>
+                        <a:srgbClr val="000000"/>
+                      </a:solidFill>
+                      <a:prstDash val="solid"/>
+                      <a:headEnd type="none" w="med" len="med"/>
+                      <a:tailEnd type="none" w="med" len="med"/>
+                    </a:lnL>
+                    <a:lnR w="6350" cap="flat" cmpd="sng">
+                      <a:solidFill>
+                        <a:srgbClr val="000000"/>
+                      </a:solidFill>
+                      <a:prstDash val="solid"/>
+                      <a:headEnd type="none" w="med" len="med"/>
+                      <a:tailEnd type="none" w="med" len="med"/>
+                    </a:lnR>
+                    <a:lnT w="6350" cap="flat" cmpd="sng">
+                      <a:solidFill>
+                        <a:srgbClr val="000000"/>
+                      </a:solidFill>
+                      <a:prstDash val="solid"/>
+                      <a:headEnd type="none" w="med" len="med"/>
+                      <a:tailEnd type="none" w="med" len="med"/>
+                    </a:lnT>
+                    <a:lnB w="6350" cap="flat" cmpd="sng">
+                      <a:solidFill>
+                        <a:srgbClr val="000000"/>
+                      </a:solidFill>
+                      <a:prstDash val="solid"/>
+                      <a:headEnd type="none" w="med" len="med"/>
+                      <a:tailEnd type="none" w="med" len="med"/>
+                    </a:lnB>
+                    <a:noFill/>
+                  </a:tcPr>
+                </a:tc>
+                <a:tc>
+                  <a:txBody>
+                    <a:bodyPr/>
+                    <a:p>
+                      <a:pPr>
+                        <a:spcBef>
+                          <a:spcPct val="0"/>
+                        </a:spcBef>
+                        <a:spcAft>
+                          <a:spcPct val="0"/>
+                        </a:spcAft>
+                      </a:pPr>
+                      <a:r>
+                        <a:rPr lang="en-US" altLang="zh-CN" sz="1200">
+                          <a:latin typeface="Times New Roman" panose="02020603050405020304" charset="0"/>
+                          <a:ea typeface="Google Sans Text"/>
+                          <a:cs typeface="Times New Roman" panose="02020603050405020304" charset="0"/>
+                        </a:rPr>
+                        <a:t>Main Responsibilities</a:t>
+                      </a:r>
+                      <a:endParaRPr lang="en-US" altLang="zh-CN" sz="1200">
+                        <a:latin typeface="Times New Roman" panose="02020603050405020304" charset="0"/>
+                        <a:ea typeface="Google Sans Text"/>
+                        <a:cs typeface="Times New Roman" panose="02020603050405020304" charset="0"/>
+                      </a:endParaRPr>
+                    </a:p>
+                  </a:txBody>
+                  <a:tcPr marL="0" marR="0" marT="0" marB="0" anchor="ctr" anchorCtr="0">
+                    <a:lnL w="6350" cap="flat" cmpd="sng">
+                      <a:solidFill>
+                        <a:srgbClr val="000000"/>
+                      </a:solidFill>
+                      <a:prstDash val="solid"/>
+                      <a:headEnd type="none" w="med" len="med"/>
+                      <a:tailEnd type="none" w="med" len="med"/>
+                    </a:lnL>
+                    <a:lnR w="6350" cap="flat" cmpd="sng">
+                      <a:solidFill>
+                        <a:srgbClr val="000000"/>
+                      </a:solidFill>
+                      <a:prstDash val="solid"/>
+                      <a:headEnd type="none" w="med" len="med"/>
+                      <a:tailEnd type="none" w="med" len="med"/>
+                    </a:lnR>
+                    <a:lnT w="6350" cap="flat" cmpd="sng">
+                      <a:solidFill>
+                        <a:srgbClr val="000000"/>
+                      </a:solidFill>
+                      <a:prstDash val="solid"/>
+                      <a:headEnd type="none" w="med" len="med"/>
+                      <a:tailEnd type="none" w="med" len="med"/>
+                    </a:lnT>
+                    <a:lnB w="6350" cap="flat" cmpd="sng">
+                      <a:solidFill>
+                        <a:srgbClr val="000000"/>
+                      </a:solidFill>
+                      <a:prstDash val="solid"/>
+                      <a:headEnd type="none" w="med" len="med"/>
+                      <a:tailEnd type="none" w="med" len="med"/>
+                    </a:lnB>
+                    <a:noFill/>
+                  </a:tcPr>
+                </a:tc>
+              </a:tr>
+              <a:tr h="484505">
+                <a:tc>
+                  <a:txBody>
+                    <a:bodyPr/>
+                    <a:p>
+                      <a:pPr>
+                        <a:spcBef>
+                          <a:spcPct val="0"/>
+                        </a:spcBef>
+                      </a:pPr>
+                      <a:r>
+                        <a:rPr lang="en-US" altLang="zh-CN" sz="1200" b="1">
+                          <a:latin typeface="Times New Roman" panose="02020603050405020304" charset="0"/>
+                          <a:ea typeface="Google Sans Text"/>
+                          <a:cs typeface="Times New Roman" panose="02020603050405020304" charset="0"/>
+                        </a:rPr>
+                        <a:t>Haoran Gu</a:t>
+                      </a:r>
+                      <a:r>
+                        <a:rPr lang="zh-CN" altLang="en-US" sz="1200" b="1">
+                          <a:latin typeface="Times New Roman" panose="02020603050405020304" charset="0"/>
+                          <a:ea typeface="宋体" panose="02010600030101010101" pitchFamily="2" charset="-122"/>
+                          <a:cs typeface="Times New Roman" panose="02020603050405020304" charset="0"/>
+                        </a:rPr>
+                        <a:t>（</a:t>
+                      </a:r>
+                      <a:r>
+                        <a:rPr lang="en-US" altLang="zh-CN" sz="1200" b="1">
+                          <a:latin typeface="Times New Roman" panose="02020603050405020304" charset="0"/>
+                          <a:ea typeface="宋体" panose="02010600030101010101" pitchFamily="2" charset="-122"/>
+                          <a:cs typeface="Times New Roman" panose="02020603050405020304" charset="0"/>
+                        </a:rPr>
+                        <a:t>3159487G</a:t>
+                      </a:r>
+                      <a:r>
+                        <a:rPr lang="zh-CN" altLang="en-US" sz="1200" b="1">
+                          <a:latin typeface="Times New Roman" panose="02020603050405020304" charset="0"/>
+                          <a:ea typeface="宋体" panose="02010600030101010101" pitchFamily="2" charset="-122"/>
+                          <a:cs typeface="Times New Roman" panose="02020603050405020304" charset="0"/>
+                        </a:rPr>
+                        <a:t>）</a:t>
+                      </a:r>
+                      <a:endParaRPr lang="zh-CN" altLang="en-US" sz="1200" b="1">
+                        <a:latin typeface="Times New Roman" panose="02020603050405020304" charset="0"/>
+                        <a:ea typeface="宋体" panose="02010600030101010101" pitchFamily="2" charset="-122"/>
+                        <a:cs typeface="Times New Roman" panose="02020603050405020304" charset="0"/>
+                      </a:endParaRPr>
+                    </a:p>
+                  </a:txBody>
+                  <a:tcPr marL="0" marR="0" marT="0" marB="0" anchor="ctr" anchorCtr="0">
+                    <a:lnL w="6350" cap="flat" cmpd="sng">
+                      <a:solidFill>
+                        <a:srgbClr val="000000"/>
+                      </a:solidFill>
+                      <a:prstDash val="solid"/>
+                      <a:headEnd type="none" w="med" len="med"/>
+                      <a:tailEnd type="none" w="med" len="med"/>
+                    </a:lnL>
+                    <a:lnR w="6350" cap="flat" cmpd="sng">
+                      <a:solidFill>
+                        <a:srgbClr val="000000"/>
+                      </a:solidFill>
+                      <a:prstDash val="solid"/>
+                      <a:headEnd type="none" w="med" len="med"/>
+                      <a:tailEnd type="none" w="med" len="med"/>
+                    </a:lnR>
+                    <a:lnT w="6350" cap="flat" cmpd="sng">
+                      <a:solidFill>
+                        <a:srgbClr val="000000"/>
+                      </a:solidFill>
+                      <a:prstDash val="solid"/>
+                      <a:headEnd type="none" w="med" len="med"/>
+                      <a:tailEnd type="none" w="med" len="med"/>
+                    </a:lnT>
+                    <a:lnB w="6350" cap="flat" cmpd="sng">
+                      <a:solidFill>
+                        <a:srgbClr val="000000"/>
+                      </a:solidFill>
+                      <a:prstDash val="solid"/>
+                      <a:headEnd type="none" w="med" len="med"/>
+                      <a:tailEnd type="none" w="med" len="med"/>
+                    </a:lnB>
+                    <a:noFill/>
+                  </a:tcPr>
+                </a:tc>
+                <a:tc>
+                  <a:txBody>
+                    <a:bodyPr/>
+                    <a:p>
+                      <a:pPr>
+                        <a:spcBef>
+                          <a:spcPct val="0"/>
+                        </a:spcBef>
+                      </a:pPr>
+                      <a:r>
+                        <a:rPr lang="en-US" altLang="zh-CN" sz="1200" b="1">
+                          <a:latin typeface="Times New Roman" panose="02020603050405020304" charset="0"/>
+                          <a:ea typeface="Google Sans Text"/>
+                          <a:cs typeface="Times New Roman" panose="02020603050405020304" charset="0"/>
+                        </a:rPr>
+                        <a:t>34%</a:t>
+                      </a:r>
+                      <a:endParaRPr lang="en-US" altLang="zh-CN" sz="1200" b="1">
+                        <a:latin typeface="Times New Roman" panose="02020603050405020304" charset="0"/>
+                        <a:ea typeface="Google Sans Text"/>
+                        <a:cs typeface="Times New Roman" panose="02020603050405020304" charset="0"/>
+                      </a:endParaRPr>
+                    </a:p>
+                  </a:txBody>
+                  <a:tcPr marL="0" marR="0" marT="0" marB="0" anchor="ctr" anchorCtr="0">
+                    <a:lnL w="6350" cap="flat" cmpd="sng">
+                      <a:solidFill>
+                        <a:srgbClr val="000000"/>
+                      </a:solidFill>
+                      <a:prstDash val="solid"/>
+                      <a:headEnd type="none" w="med" len="med"/>
+                      <a:tailEnd type="none" w="med" len="med"/>
+                    </a:lnL>
+                    <a:lnR w="6350" cap="flat" cmpd="sng">
+                      <a:solidFill>
+                        <a:srgbClr val="000000"/>
+                      </a:solidFill>
+                      <a:prstDash val="solid"/>
+                      <a:headEnd type="none" w="med" len="med"/>
+                      <a:tailEnd type="none" w="med" len="med"/>
+                    </a:lnR>
+                    <a:lnT w="6350" cap="flat" cmpd="sng">
+                      <a:solidFill>
+                        <a:srgbClr val="000000"/>
+                      </a:solidFill>
+                      <a:prstDash val="solid"/>
+                      <a:headEnd type="none" w="med" len="med"/>
+                      <a:tailEnd type="none" w="med" len="med"/>
+                    </a:lnT>
+                    <a:lnB w="6350" cap="flat" cmpd="sng">
+                      <a:solidFill>
+                        <a:srgbClr val="000000"/>
+                      </a:solidFill>
+                      <a:prstDash val="solid"/>
+                      <a:headEnd type="none" w="med" len="med"/>
+                      <a:tailEnd type="none" w="med" len="med"/>
+                    </a:lnB>
+                    <a:noFill/>
+                  </a:tcPr>
+                </a:tc>
+                <a:tc>
+                  <a:txBody>
+                    <a:bodyPr/>
+                    <a:p>
+                      <a:pPr>
+                        <a:spcBef>
+                          <a:spcPct val="0"/>
+                        </a:spcBef>
+                      </a:pPr>
+                      <a:r>
+                        <a:rPr lang="en-US" altLang="zh-CN" sz="1200">
+                          <a:latin typeface="Times New Roman" panose="02020603050405020304" charset="0"/>
+                          <a:ea typeface="Google Sans Text"/>
+                          <a:cs typeface="Times New Roman" panose="02020603050405020304" charset="0"/>
+                        </a:rPr>
+                        <a:t>Project management, System Architecture, Wireframes (Dashboard &amp; Login), Final review.</a:t>
+                      </a:r>
+                      <a:endParaRPr lang="en-US" altLang="zh-CN" sz="1200">
+                        <a:latin typeface="Times New Roman" panose="02020603050405020304" charset="0"/>
+                        <a:ea typeface="Google Sans Text"/>
+                        <a:cs typeface="Times New Roman" panose="02020603050405020304" charset="0"/>
+                      </a:endParaRPr>
+                    </a:p>
+                  </a:txBody>
+                  <a:tcPr marL="0" marR="0" marT="0" marB="0" anchor="ctr" anchorCtr="0">
+                    <a:lnL w="6350" cap="flat" cmpd="sng">
+                      <a:solidFill>
+                        <a:srgbClr val="000000"/>
+                      </a:solidFill>
+                      <a:prstDash val="solid"/>
+                      <a:headEnd type="none" w="med" len="med"/>
+                      <a:tailEnd type="none" w="med" len="med"/>
+                    </a:lnL>
+                    <a:lnR w="6350" cap="flat" cmpd="sng">
+                      <a:solidFill>
+                        <a:srgbClr val="000000"/>
+                      </a:solidFill>
+                      <a:prstDash val="solid"/>
+                      <a:headEnd type="none" w="med" len="med"/>
+                      <a:tailEnd type="none" w="med" len="med"/>
+                    </a:lnR>
+                    <a:lnT w="6350" cap="flat" cmpd="sng">
+                      <a:solidFill>
+                        <a:srgbClr val="000000"/>
+                      </a:solidFill>
+                      <a:prstDash val="solid"/>
+                      <a:headEnd type="none" w="med" len="med"/>
+                      <a:tailEnd type="none" w="med" len="med"/>
+                    </a:lnT>
+                    <a:lnB w="6350" cap="flat" cmpd="sng">
+                      <a:solidFill>
+                        <a:srgbClr val="000000"/>
+                      </a:solidFill>
+                      <a:prstDash val="solid"/>
+                      <a:headEnd type="none" w="med" len="med"/>
+                      <a:tailEnd type="none" w="med" len="med"/>
+                    </a:lnB>
+                    <a:noFill/>
+                  </a:tcPr>
+                </a:tc>
+              </a:tr>
+              <a:tr h="484505">
+                <a:tc>
+                  <a:txBody>
+                    <a:bodyPr/>
+                    <a:p>
+                      <a:pPr>
+                        <a:spcBef>
+                          <a:spcPct val="0"/>
+                        </a:spcBef>
+                      </a:pPr>
+                      <a:r>
+                        <a:rPr lang="en-US" altLang="zh-CN" sz="1200" b="1">
+                          <a:latin typeface="Times New Roman" panose="02020603050405020304" charset="0"/>
+                          <a:ea typeface="Google Sans Text"/>
+                          <a:cs typeface="Times New Roman" panose="02020603050405020304" charset="0"/>
+                        </a:rPr>
+                        <a:t>Hanyu Zhang</a:t>
+                      </a:r>
+                      <a:r>
+                        <a:rPr lang="zh-CN" altLang="en-US" sz="1200" b="1">
+                          <a:latin typeface="Times New Roman" panose="02020603050405020304" charset="0"/>
+                          <a:ea typeface="宋体" panose="02010600030101010101" pitchFamily="2" charset="-122"/>
+                          <a:cs typeface="Times New Roman" panose="02020603050405020304" charset="0"/>
+                        </a:rPr>
+                        <a:t>（</a:t>
+                      </a:r>
+                      <a:r>
+                        <a:rPr lang="en-US" altLang="zh-CN" sz="1200" b="1">
+                          <a:latin typeface="Times New Roman" panose="02020603050405020304" charset="0"/>
+                          <a:ea typeface="宋体" panose="02010600030101010101" pitchFamily="2" charset="-122"/>
+                          <a:cs typeface="Times New Roman" panose="02020603050405020304" charset="0"/>
+                        </a:rPr>
+                        <a:t>3158754Z</a:t>
+                      </a:r>
+                      <a:r>
+                        <a:rPr lang="zh-CN" altLang="en-US" sz="1200" b="1">
+                          <a:latin typeface="Times New Roman" panose="02020603050405020304" charset="0"/>
+                          <a:ea typeface="宋体" panose="02010600030101010101" pitchFamily="2" charset="-122"/>
+                          <a:cs typeface="Times New Roman" panose="02020603050405020304" charset="0"/>
+                        </a:rPr>
+                        <a:t>）</a:t>
+                      </a:r>
+                      <a:endParaRPr lang="zh-CN" altLang="en-US" sz="1200" b="1">
+                        <a:latin typeface="Times New Roman" panose="02020603050405020304" charset="0"/>
+                        <a:ea typeface="宋体" panose="02010600030101010101" pitchFamily="2" charset="-122"/>
+                        <a:cs typeface="Times New Roman" panose="02020603050405020304" charset="0"/>
+                      </a:endParaRPr>
+                    </a:p>
+                  </a:txBody>
+                  <a:tcPr marL="0" marR="0" marT="0" marB="0" anchor="ctr" anchorCtr="0">
+                    <a:lnL w="6350" cap="flat" cmpd="sng">
+                      <a:solidFill>
+                        <a:srgbClr val="000000"/>
+                      </a:solidFill>
+                      <a:prstDash val="solid"/>
+                      <a:headEnd type="none" w="med" len="med"/>
+                      <a:tailEnd type="none" w="med" len="med"/>
+                    </a:lnL>
+                    <a:lnR w="6350" cap="flat" cmpd="sng">
+                      <a:solidFill>
+                        <a:srgbClr val="000000"/>
+                      </a:solidFill>
+                      <a:prstDash val="solid"/>
+                      <a:headEnd type="none" w="med" len="med"/>
+                      <a:tailEnd type="none" w="med" len="med"/>
+                    </a:lnR>
+                    <a:lnT w="6350" cap="flat" cmpd="sng">
+                      <a:solidFill>
+                        <a:srgbClr val="000000"/>
+                      </a:solidFill>
+                      <a:prstDash val="solid"/>
+                      <a:headEnd type="none" w="med" len="med"/>
+                      <a:tailEnd type="none" w="med" len="med"/>
+                    </a:lnT>
+                    <a:lnB w="6350" cap="flat" cmpd="sng">
+                      <a:solidFill>
+                        <a:srgbClr val="000000"/>
+                      </a:solidFill>
+                      <a:prstDash val="solid"/>
+                      <a:headEnd type="none" w="med" len="med"/>
+                      <a:tailEnd type="none" w="med" len="med"/>
+                    </a:lnB>
+                    <a:noFill/>
+                  </a:tcPr>
+                </a:tc>
+                <a:tc>
+                  <a:txBody>
+                    <a:bodyPr/>
+                    <a:p>
+                      <a:pPr>
+                        <a:spcBef>
+                          <a:spcPct val="0"/>
+                        </a:spcBef>
+                      </a:pPr>
+                      <a:r>
+                        <a:rPr lang="en-US" altLang="zh-CN" sz="1200" b="1">
+                          <a:latin typeface="Times New Roman" panose="02020603050405020304" charset="0"/>
+                          <a:ea typeface="Google Sans Text"/>
+                          <a:cs typeface="Times New Roman" panose="02020603050405020304" charset="0"/>
+                        </a:rPr>
+                        <a:t>33%</a:t>
+                      </a:r>
+                      <a:endParaRPr lang="en-US" altLang="zh-CN" sz="1200" b="1">
+                        <a:latin typeface="Times New Roman" panose="02020603050405020304" charset="0"/>
+                        <a:ea typeface="Google Sans Text"/>
+                        <a:cs typeface="Times New Roman" panose="02020603050405020304" charset="0"/>
+                      </a:endParaRPr>
+                    </a:p>
+                  </a:txBody>
+                  <a:tcPr marL="0" marR="0" marT="0" marB="0" anchor="ctr" anchorCtr="0">
+                    <a:lnL w="6350" cap="flat" cmpd="sng">
+                      <a:solidFill>
+                        <a:srgbClr val="000000"/>
+                      </a:solidFill>
+                      <a:prstDash val="solid"/>
+                      <a:headEnd type="none" w="med" len="med"/>
+                      <a:tailEnd type="none" w="med" len="med"/>
+                    </a:lnL>
+                    <a:lnR w="6350" cap="flat" cmpd="sng">
+                      <a:solidFill>
+                        <a:srgbClr val="000000"/>
+                      </a:solidFill>
+                      <a:prstDash val="solid"/>
+                      <a:headEnd type="none" w="med" len="med"/>
+                      <a:tailEnd type="none" w="med" len="med"/>
+                    </a:lnR>
+                    <a:lnT w="6350" cap="flat" cmpd="sng">
+                      <a:solidFill>
+                        <a:srgbClr val="000000"/>
+                      </a:solidFill>
+                      <a:prstDash val="solid"/>
+                      <a:headEnd type="none" w="med" len="med"/>
+                      <a:tailEnd type="none" w="med" len="med"/>
+                    </a:lnT>
+                    <a:lnB w="6350" cap="flat" cmpd="sng">
+                      <a:solidFill>
+                        <a:srgbClr val="000000"/>
+                      </a:solidFill>
+                      <a:prstDash val="solid"/>
+                      <a:headEnd type="none" w="med" len="med"/>
+                      <a:tailEnd type="none" w="med" len="med"/>
+                    </a:lnB>
+                    <a:noFill/>
+                  </a:tcPr>
+                </a:tc>
+                <a:tc>
+                  <a:txBody>
+                    <a:bodyPr/>
+                    <a:p>
+                      <a:pPr>
+                        <a:spcBef>
+                          <a:spcPct val="0"/>
+                        </a:spcBef>
+                      </a:pPr>
+                      <a:r>
+                        <a:rPr lang="en-US" altLang="zh-CN" sz="1200">
+                          <a:latin typeface="Times New Roman" panose="02020603050405020304" charset="0"/>
+                          <a:ea typeface="Google Sans Text"/>
+                          <a:cs typeface="Times New Roman" panose="02020603050405020304" charset="0"/>
+                        </a:rPr>
+                        <a:t>Specification (User Stories), ER Diagram design, Wireframes (Forms), Accessibility Plan.</a:t>
+                      </a:r>
+                      <a:endParaRPr lang="en-US" altLang="zh-CN" sz="1200">
+                        <a:latin typeface="Times New Roman" panose="02020603050405020304" charset="0"/>
+                        <a:ea typeface="Google Sans Text"/>
+                        <a:cs typeface="Times New Roman" panose="02020603050405020304" charset="0"/>
+                      </a:endParaRPr>
+                    </a:p>
+                  </a:txBody>
+                  <a:tcPr marL="0" marR="0" marT="0" marB="0" anchor="ctr" anchorCtr="0">
+                    <a:lnL w="6350" cap="flat" cmpd="sng">
+                      <a:solidFill>
+                        <a:srgbClr val="000000"/>
+                      </a:solidFill>
+                      <a:prstDash val="solid"/>
+                      <a:headEnd type="none" w="med" len="med"/>
+                      <a:tailEnd type="none" w="med" len="med"/>
+                    </a:lnL>
+                    <a:lnR w="6350" cap="flat" cmpd="sng">
+                      <a:solidFill>
+                        <a:srgbClr val="000000"/>
+                      </a:solidFill>
+                      <a:prstDash val="solid"/>
+                      <a:headEnd type="none" w="med" len="med"/>
+                      <a:tailEnd type="none" w="med" len="med"/>
+                    </a:lnR>
+                    <a:lnT w="6350" cap="flat" cmpd="sng">
+                      <a:solidFill>
+                        <a:srgbClr val="000000"/>
+                      </a:solidFill>
+                      <a:prstDash val="solid"/>
+                      <a:headEnd type="none" w="med" len="med"/>
+                      <a:tailEnd type="none" w="med" len="med"/>
+                    </a:lnT>
+                    <a:lnB w="6350" cap="flat" cmpd="sng">
+                      <a:solidFill>
+                        <a:srgbClr val="000000"/>
+                      </a:solidFill>
+                      <a:prstDash val="solid"/>
+                      <a:headEnd type="none" w="med" len="med"/>
+                      <a:tailEnd type="none" w="med" len="med"/>
+                    </a:lnB>
+                    <a:noFill/>
+                  </a:tcPr>
+                </a:tc>
+              </a:tr>
+              <a:tr h="485140">
+                <a:tc>
+                  <a:txBody>
+                    <a:bodyPr/>
+                    <a:p>
+                      <a:pPr>
+                        <a:spcBef>
+                          <a:spcPct val="0"/>
+                        </a:spcBef>
+                      </a:pPr>
+                      <a:r>
+                        <a:rPr lang="en-US" altLang="zh-CN" sz="1200" b="1">
+                          <a:latin typeface="Times New Roman" panose="02020603050405020304" charset="0"/>
+                          <a:ea typeface="Google Sans Text"/>
+                          <a:cs typeface="Times New Roman" panose="02020603050405020304" charset="0"/>
+                        </a:rPr>
+                        <a:t>Chuhan Su</a:t>
+                      </a:r>
+                      <a:r>
+                        <a:rPr lang="zh-CN" altLang="en-US" sz="1200" b="1">
+                          <a:latin typeface="Times New Roman" panose="02020603050405020304" charset="0"/>
+                          <a:ea typeface="宋体" panose="02010600030101010101" pitchFamily="2" charset="-122"/>
+                          <a:cs typeface="Times New Roman" panose="02020603050405020304" charset="0"/>
+                        </a:rPr>
+                        <a:t>（</a:t>
+                      </a:r>
+                      <a:r>
+                        <a:rPr lang="en-US" altLang="zh-CN" sz="1200" b="1">
+                          <a:latin typeface="Times New Roman" panose="02020603050405020304" charset="0"/>
+                          <a:ea typeface="宋体" panose="02010600030101010101" pitchFamily="2" charset="-122"/>
+                          <a:cs typeface="Times New Roman" panose="02020603050405020304" charset="0"/>
+                        </a:rPr>
+                        <a:t>3023779S</a:t>
+                      </a:r>
+                      <a:r>
+                        <a:rPr lang="zh-CN" altLang="en-US" sz="1200" b="1">
+                          <a:latin typeface="Times New Roman" panose="02020603050405020304" charset="0"/>
+                          <a:ea typeface="宋体" panose="02010600030101010101" pitchFamily="2" charset="-122"/>
+                          <a:cs typeface="Times New Roman" panose="02020603050405020304" charset="0"/>
+                        </a:rPr>
+                        <a:t>）</a:t>
+                      </a:r>
+                      <a:endParaRPr lang="zh-CN" altLang="en-US" sz="1200" b="1">
+                        <a:latin typeface="Times New Roman" panose="02020603050405020304" charset="0"/>
+                        <a:ea typeface="宋体" panose="02010600030101010101" pitchFamily="2" charset="-122"/>
+                        <a:cs typeface="Times New Roman" panose="02020603050405020304" charset="0"/>
+                      </a:endParaRPr>
+                    </a:p>
+                  </a:txBody>
+                  <a:tcPr marL="0" marR="0" marT="0" marB="0" anchor="ctr" anchorCtr="0">
+                    <a:lnL w="6350" cap="flat" cmpd="sng">
+                      <a:solidFill>
+                        <a:srgbClr val="000000"/>
+                      </a:solidFill>
+                      <a:prstDash val="solid"/>
+                      <a:headEnd type="none" w="med" len="med"/>
+                      <a:tailEnd type="none" w="med" len="med"/>
+                    </a:lnL>
+                    <a:lnR w="6350" cap="flat" cmpd="sng">
+                      <a:solidFill>
+                        <a:srgbClr val="000000"/>
+                      </a:solidFill>
+                      <a:prstDash val="solid"/>
+                      <a:headEnd type="none" w="med" len="med"/>
+                      <a:tailEnd type="none" w="med" len="med"/>
+                    </a:lnR>
+                    <a:lnT w="6350" cap="flat" cmpd="sng">
+                      <a:solidFill>
+                        <a:srgbClr val="000000"/>
+                      </a:solidFill>
+                      <a:prstDash val="solid"/>
+                      <a:headEnd type="none" w="med" len="med"/>
+                      <a:tailEnd type="none" w="med" len="med"/>
+                    </a:lnT>
+                    <a:lnB w="6350" cap="flat" cmpd="sng">
+                      <a:solidFill>
+                        <a:srgbClr val="000000"/>
+                      </a:solidFill>
+                      <a:prstDash val="solid"/>
+                      <a:headEnd type="none" w="med" len="med"/>
+                      <a:tailEnd type="none" w="med" len="med"/>
+                    </a:lnB>
+                    <a:noFill/>
+                  </a:tcPr>
+                </a:tc>
+                <a:tc>
+                  <a:txBody>
+                    <a:bodyPr/>
+                    <a:p>
+                      <a:pPr>
+                        <a:spcBef>
+                          <a:spcPct val="0"/>
+                        </a:spcBef>
+                      </a:pPr>
+                      <a:r>
+                        <a:rPr lang="en-US" altLang="zh-CN" sz="1200" b="1">
+                          <a:latin typeface="Times New Roman" panose="02020603050405020304" charset="0"/>
+                          <a:ea typeface="Google Sans Text"/>
+                          <a:cs typeface="Times New Roman" panose="02020603050405020304" charset="0"/>
+                        </a:rPr>
+                        <a:t>33%</a:t>
+                      </a:r>
+                      <a:endParaRPr lang="en-US" altLang="zh-CN" sz="1200" b="1">
+                        <a:latin typeface="Times New Roman" panose="02020603050405020304" charset="0"/>
+                        <a:ea typeface="Google Sans Text"/>
+                        <a:cs typeface="Times New Roman" panose="02020603050405020304" charset="0"/>
+                      </a:endParaRPr>
+                    </a:p>
+                  </a:txBody>
+                  <a:tcPr marL="0" marR="0" marT="0" marB="0" anchor="ctr" anchorCtr="0">
+                    <a:lnL w="6350" cap="flat" cmpd="sng">
+                      <a:solidFill>
+                        <a:srgbClr val="000000"/>
+                      </a:solidFill>
+                      <a:prstDash val="solid"/>
+                      <a:headEnd type="none" w="med" len="med"/>
+                      <a:tailEnd type="none" w="med" len="med"/>
+                    </a:lnL>
+                    <a:lnR w="6350" cap="flat" cmpd="sng">
+                      <a:solidFill>
+                        <a:srgbClr val="000000"/>
+                      </a:solidFill>
+                      <a:prstDash val="solid"/>
+                      <a:headEnd type="none" w="med" len="med"/>
+                      <a:tailEnd type="none" w="med" len="med"/>
+                    </a:lnR>
+                    <a:lnT w="6350" cap="flat" cmpd="sng">
+                      <a:solidFill>
+                        <a:srgbClr val="000000"/>
+                      </a:solidFill>
+                      <a:prstDash val="solid"/>
+                      <a:headEnd type="none" w="med" len="med"/>
+                      <a:tailEnd type="none" w="med" len="med"/>
+                    </a:lnT>
+                    <a:lnB w="6350" cap="flat" cmpd="sng">
+                      <a:solidFill>
+                        <a:srgbClr val="000000"/>
+                      </a:solidFill>
+                      <a:prstDash val="solid"/>
+                      <a:headEnd type="none" w="med" len="med"/>
+                      <a:tailEnd type="none" w="med" len="med"/>
+                    </a:lnB>
+                    <a:noFill/>
+                  </a:tcPr>
+                </a:tc>
+                <a:tc>
+                  <a:txBody>
+                    <a:bodyPr/>
+                    <a:p>
+                      <a:pPr>
+                        <a:spcBef>
+                          <a:spcPct val="0"/>
+                        </a:spcBef>
+                      </a:pPr>
+                      <a:r>
+                        <a:rPr lang="en-US" altLang="zh-CN" sz="1200">
+                          <a:latin typeface="Times New Roman" panose="02020603050405020304" charset="0"/>
+                          <a:ea typeface="Google Sans Text"/>
+                          <a:cs typeface="Times New Roman" panose="02020603050405020304" charset="0"/>
+                        </a:rPr>
+                        <a:t>Site Map structure, Database schema details, Overview slides, Presentation formatting.</a:t>
+                      </a:r>
+                      <a:endParaRPr lang="en-US" altLang="zh-CN" sz="1200">
+                        <a:latin typeface="Times New Roman" panose="02020603050405020304" charset="0"/>
+                        <a:ea typeface="Google Sans Text"/>
+                        <a:cs typeface="Times New Roman" panose="02020603050405020304" charset="0"/>
+                      </a:endParaRPr>
+                    </a:p>
+                  </a:txBody>
+                  <a:tcPr marL="0" marR="0" marT="0" marB="0" anchor="ctr" anchorCtr="0">
+                    <a:lnL w="6350" cap="flat" cmpd="sng">
+                      <a:solidFill>
+                        <a:srgbClr val="000000"/>
+                      </a:solidFill>
+                      <a:prstDash val="solid"/>
+                      <a:headEnd type="none" w="med" len="med"/>
+                      <a:tailEnd type="none" w="med" len="med"/>
+                    </a:lnL>
+                    <a:lnR w="6350" cap="flat" cmpd="sng">
+                      <a:solidFill>
+                        <a:srgbClr val="000000"/>
+                      </a:solidFill>
+                      <a:prstDash val="solid"/>
+                      <a:headEnd type="none" w="med" len="med"/>
+                      <a:tailEnd type="none" w="med" len="med"/>
+                    </a:lnR>
+                    <a:lnT w="6350" cap="flat" cmpd="sng">
+                      <a:solidFill>
+                        <a:srgbClr val="000000"/>
+                      </a:solidFill>
+                      <a:prstDash val="solid"/>
+                      <a:headEnd type="none" w="med" len="med"/>
+                      <a:tailEnd type="none" w="med" len="med"/>
+                    </a:lnT>
+                    <a:lnB w="6350" cap="flat" cmpd="sng">
+                      <a:solidFill>
+                        <a:srgbClr val="000000"/>
+                      </a:solidFill>
+                      <a:prstDash val="solid"/>
+                      <a:headEnd type="none" w="med" len="med"/>
+                      <a:tailEnd type="none" w="med" len="med"/>
+                    </a:lnB>
+                    <a:noFill/>
+                  </a:tcPr>
+                </a:tc>
+              </a:tr>
+            </a:tbl>
+          </a:graphicData>
+        </a:graphic>
+      </p:graphicFrame>
+    </p:spTree>
+    <p:custDataLst>
+      <p:tags r:id="rId2"/>
+    </p:custDataLst>
+  </p:cSld>
+  <p:clrMapOvr>
+    <a:masterClrMapping/>
+  </p:clrMapOvr>
+</p:sld>
+</file>
+
 <file path=ppt/slides/slide2.xml><?xml version="1.0" encoding="utf-8"?>
 <p:sld xmlns:a="http://schemas.openxmlformats.org/drawingml/2006/main" xmlns:r="http://schemas.openxmlformats.org/officeDocument/2006/relationships" xmlns:p="http://schemas.openxmlformats.org/presentationml/2006/main">
   <p:cSld>
@@ -3167,6 +4386,7 @@
         <p:txBody>
           <a:bodyPr/>
           <a:p>
+            <a:pPr algn="ctr"/>
             <a:r>
               <a:rPr lang="en-US" altLang="zh-CN"/>
               <a:t>Overview</a:t>
@@ -3324,6 +4544,7 @@
             <a:normAutofit fontScale="90000"/>
           </a:bodyPr>
           <a:p>
+            <a:pPr algn="ctr"/>
             <a:r>
               <a:rPr lang="en-US" altLang="zh-CN"/>
               <a:t>User Stories (MoSCoW)</a:t>
@@ -5037,28 +6258,1378 @@
             <p:ph type="title"/>
           </p:nvPr>
         </p:nvSpPr>
-        <p:spPr/>
+        <p:spPr>
+          <a:xfrm>
+            <a:off x="608400" y="497910"/>
+            <a:ext cx="10969200" cy="705600"/>
+          </a:xfrm>
+        </p:spPr>
         <p:txBody>
           <a:bodyPr/>
           <a:p>
-            <a:endParaRPr lang="zh-CN" altLang="en-US"/>
+            <a:pPr algn="ctr"/>
+            <a:r>
+              <a:rPr lang="en-US" altLang="zh-CN"/>
+              <a:t>System Architecture</a:t>
+            </a:r>
+            <a:endParaRPr lang="en-US" altLang="zh-CN"/>
           </a:p>
         </p:txBody>
       </p:sp>
       <p:sp>
         <p:nvSpPr>
-          <p:cNvPr id="3" name="内容占位符 2"/>
+          <p:cNvPr id="5" name="文本框 4"/>
+          <p:cNvSpPr txBox="1"/>
+          <p:nvPr/>
+        </p:nvSpPr>
+        <p:spPr>
+          <a:xfrm>
+            <a:off x="9350375" y="1203325"/>
+            <a:ext cx="2679700" cy="4102100"/>
+          </a:xfrm>
+          <a:prstGeom prst="rect">
+            <a:avLst/>
+          </a:prstGeom>
+          <a:noFill/>
+        </p:spPr>
+        <p:txBody>
+          <a:bodyPr wrap="square" rtlCol="0">
+            <a:noAutofit/>
+          </a:bodyPr>
+          <a:p>
+            <a:r>
+              <a:rPr lang="en-US" altLang="zh-CN"/>
+              <a:t>The framework taught in class is convenient for development, but it is not very conducive to collaborative development. To facilitate collaborative development, we adopted this front-end and back-end separated system architecture to meet our needs.</a:t>
+            </a:r>
+            <a:endParaRPr lang="en-US" altLang="zh-CN"/>
+          </a:p>
+        </p:txBody>
+      </p:sp>
+      <p:pic>
+        <p:nvPicPr>
+          <p:cNvPr id="7" name="内容占位符 6"/>
+          <p:cNvPicPr>
+            <a:picLocks noChangeAspect="1"/>
+          </p:cNvPicPr>
+          <p:nvPr>
+            <p:ph idx="1"/>
+          </p:nvPr>
+        </p:nvPicPr>
+        <p:blipFill>
+          <a:blip r:embed="rId1"/>
+          <a:stretch>
+            <a:fillRect/>
+          </a:stretch>
+        </p:blipFill>
+        <p:spPr>
+          <a:xfrm>
+            <a:off x="65405" y="1203325"/>
+            <a:ext cx="9285605" cy="5081905"/>
+          </a:xfrm>
+          <a:prstGeom prst="rect">
+            <a:avLst/>
+          </a:prstGeom>
+        </p:spPr>
+      </p:pic>
+    </p:spTree>
+    <p:custDataLst>
+      <p:tags r:id="rId2"/>
+    </p:custDataLst>
+  </p:cSld>
+  <p:clrMapOvr>
+    <a:masterClrMapping/>
+  </p:clrMapOvr>
+</p:sld>
+</file>
+
+<file path=ppt/slides/slide5.xml><?xml version="1.0" encoding="utf-8"?>
+<p:sld xmlns:a="http://schemas.openxmlformats.org/drawingml/2006/main" xmlns:r="http://schemas.openxmlformats.org/officeDocument/2006/relationships" xmlns:p="http://schemas.openxmlformats.org/presentationml/2006/main">
+  <p:cSld>
+    <p:spTree>
+      <p:nvGrpSpPr>
+        <p:cNvPr id="1" name=""/>
+        <p:cNvGrpSpPr/>
+        <p:nvPr/>
+      </p:nvGrpSpPr>
+      <p:grpSpPr/>
+      <p:sp>
+        <p:nvSpPr>
+          <p:cNvPr id="2" name="标题 1"/>
           <p:cNvSpPr>
             <a:spLocks noGrp="1"/>
           </p:cNvSpPr>
           <p:nvPr>
-            <p:ph idx="1"/>
+            <p:ph type="title"/>
           </p:nvPr>
         </p:nvSpPr>
         <p:spPr/>
         <p:txBody>
           <a:bodyPr/>
           <a:p>
+            <a:pPr algn="ctr"/>
+            <a:r>
+              <a:rPr lang="en-US" altLang="zh-CN"/>
+              <a:t>ER Diagram</a:t>
+            </a:r>
+            <a:endParaRPr lang="en-US" altLang="zh-CN"/>
+          </a:p>
+        </p:txBody>
+      </p:sp>
+      <p:pic>
+        <p:nvPicPr>
+          <p:cNvPr id="6" name="图片 5"/>
+          <p:cNvPicPr>
+            <a:picLocks noChangeAspect="1"/>
+          </p:cNvPicPr>
+          <p:nvPr/>
+        </p:nvPicPr>
+        <p:blipFill>
+          <a:blip r:embed="rId1"/>
+          <a:stretch>
+            <a:fillRect/>
+          </a:stretch>
+        </p:blipFill>
+        <p:spPr>
+          <a:xfrm>
+            <a:off x="386715" y="1240790"/>
+            <a:ext cx="5792470" cy="4990465"/>
+          </a:xfrm>
+          <a:prstGeom prst="rect">
+            <a:avLst/>
+          </a:prstGeom>
+        </p:spPr>
+      </p:pic>
+      <p:graphicFrame>
+        <p:nvGraphicFramePr>
+          <p:cNvPr id="7" name="表格 6"/>
+          <p:cNvGraphicFramePr/>
+          <p:nvPr>
+            <p:custDataLst>
+              <p:tags r:id="rId2"/>
+            </p:custDataLst>
+          </p:nvPr>
+        </p:nvGraphicFramePr>
+        <p:xfrm>
+          <a:off x="6073775" y="1487170"/>
+          <a:ext cx="5697855" cy="4555490"/>
+        </p:xfrm>
+        <a:graphic>
+          <a:graphicData uri="http://schemas.openxmlformats.org/drawingml/2006/table">
+            <a:tbl>
+              <a:tblPr/>
+              <a:tblGrid>
+                <a:gridCol w="1899285"/>
+                <a:gridCol w="1899285"/>
+                <a:gridCol w="1899285"/>
+              </a:tblGrid>
+              <a:tr h="854075">
+                <a:tc>
+                  <a:txBody>
+                    <a:bodyPr/>
+                    <a:p>
+                      <a:pPr>
+                        <a:spcBef>
+                          <a:spcPct val="0"/>
+                        </a:spcBef>
+                        <a:spcAft>
+                          <a:spcPct val="0"/>
+                        </a:spcAft>
+                      </a:pPr>
+                      <a:r>
+                        <a:rPr lang="en-US" altLang="zh-CN" sz="1400">
+                          <a:latin typeface="Times New Roman" panose="02020603050405020304" charset="0"/>
+                          <a:ea typeface="Google Sans Text"/>
+                          <a:cs typeface="Times New Roman" panose="02020603050405020304" charset="0"/>
+                        </a:rPr>
+                        <a:t>Entity </a:t>
+                      </a:r>
+                      <a:endParaRPr lang="en-US" altLang="zh-CN" sz="1400">
+                        <a:latin typeface="Times New Roman" panose="02020603050405020304" charset="0"/>
+                        <a:ea typeface="Google Sans Text"/>
+                        <a:cs typeface="Times New Roman" panose="02020603050405020304" charset="0"/>
+                      </a:endParaRPr>
+                    </a:p>
+                  </a:txBody>
+                  <a:tcPr marL="0" marR="0" marT="0" marB="0" anchor="ctr" anchorCtr="0">
+                    <a:lnL w="6350" cap="flat" cmpd="sng">
+                      <a:solidFill>
+                        <a:srgbClr val="000000"/>
+                      </a:solidFill>
+                      <a:prstDash val="solid"/>
+                      <a:headEnd type="none" w="med" len="med"/>
+                      <a:tailEnd type="none" w="med" len="med"/>
+                    </a:lnL>
+                    <a:lnR w="6350" cap="flat" cmpd="sng">
+                      <a:solidFill>
+                        <a:srgbClr val="000000"/>
+                      </a:solidFill>
+                      <a:prstDash val="solid"/>
+                      <a:headEnd type="none" w="med" len="med"/>
+                      <a:tailEnd type="none" w="med" len="med"/>
+                    </a:lnR>
+                    <a:lnT w="6350" cap="flat" cmpd="sng">
+                      <a:solidFill>
+                        <a:srgbClr val="000000"/>
+                      </a:solidFill>
+                      <a:prstDash val="solid"/>
+                      <a:headEnd type="none" w="med" len="med"/>
+                      <a:tailEnd type="none" w="med" len="med"/>
+                    </a:lnT>
+                    <a:lnB w="6350" cap="flat" cmpd="sng">
+                      <a:solidFill>
+                        <a:srgbClr val="000000"/>
+                      </a:solidFill>
+                      <a:prstDash val="solid"/>
+                      <a:headEnd type="none" w="med" len="med"/>
+                      <a:tailEnd type="none" w="med" len="med"/>
+                    </a:lnB>
+                    <a:noFill/>
+                  </a:tcPr>
+                </a:tc>
+                <a:tc>
+                  <a:txBody>
+                    <a:bodyPr/>
+                    <a:p>
+                      <a:pPr>
+                        <a:spcBef>
+                          <a:spcPct val="0"/>
+                        </a:spcBef>
+                        <a:spcAft>
+                          <a:spcPct val="0"/>
+                        </a:spcAft>
+                      </a:pPr>
+                      <a:r>
+                        <a:rPr lang="en-US" altLang="zh-CN" sz="1400">
+                          <a:latin typeface="Times New Roman" panose="02020603050405020304" charset="0"/>
+                          <a:ea typeface="Google Sans Text"/>
+                          <a:cs typeface="Times New Roman" panose="02020603050405020304" charset="0"/>
+                        </a:rPr>
+                        <a:t>Attributes (Bold = Primary Key, Italic = Foreign Key)</a:t>
+                      </a:r>
+                      <a:endParaRPr lang="en-US" altLang="zh-CN" sz="1400">
+                        <a:latin typeface="Times New Roman" panose="02020603050405020304" charset="0"/>
+                        <a:ea typeface="Google Sans Text"/>
+                        <a:cs typeface="Times New Roman" panose="02020603050405020304" charset="0"/>
+                      </a:endParaRPr>
+                    </a:p>
+                  </a:txBody>
+                  <a:tcPr marL="0" marR="0" marT="0" marB="0" anchor="ctr" anchorCtr="0">
+                    <a:lnL w="6350" cap="flat" cmpd="sng">
+                      <a:solidFill>
+                        <a:srgbClr val="000000"/>
+                      </a:solidFill>
+                      <a:prstDash val="solid"/>
+                      <a:headEnd type="none" w="med" len="med"/>
+                      <a:tailEnd type="none" w="med" len="med"/>
+                    </a:lnL>
+                    <a:lnR w="6350" cap="flat" cmpd="sng">
+                      <a:solidFill>
+                        <a:srgbClr val="000000"/>
+                      </a:solidFill>
+                      <a:prstDash val="solid"/>
+                      <a:headEnd type="none" w="med" len="med"/>
+                      <a:tailEnd type="none" w="med" len="med"/>
+                    </a:lnR>
+                    <a:lnT w="6350" cap="flat" cmpd="sng">
+                      <a:solidFill>
+                        <a:srgbClr val="000000"/>
+                      </a:solidFill>
+                      <a:prstDash val="solid"/>
+                      <a:headEnd type="none" w="med" len="med"/>
+                      <a:tailEnd type="none" w="med" len="med"/>
+                    </a:lnT>
+                    <a:lnB w="6350" cap="flat" cmpd="sng">
+                      <a:solidFill>
+                        <a:srgbClr val="000000"/>
+                      </a:solidFill>
+                      <a:prstDash val="solid"/>
+                      <a:headEnd type="none" w="med" len="med"/>
+                      <a:tailEnd type="none" w="med" len="med"/>
+                    </a:lnB>
+                    <a:noFill/>
+                  </a:tcPr>
+                </a:tc>
+                <a:tc>
+                  <a:txBody>
+                    <a:bodyPr/>
+                    <a:p>
+                      <a:pPr>
+                        <a:spcBef>
+                          <a:spcPct val="0"/>
+                        </a:spcBef>
+                        <a:spcAft>
+                          <a:spcPct val="0"/>
+                        </a:spcAft>
+                      </a:pPr>
+                      <a:r>
+                        <a:rPr lang="en-US" altLang="zh-CN" sz="1400">
+                          <a:latin typeface="Times New Roman" panose="02020603050405020304" charset="0"/>
+                          <a:ea typeface="Google Sans Text"/>
+                          <a:cs typeface="Times New Roman" panose="02020603050405020304" charset="0"/>
+                        </a:rPr>
+                        <a:t>Description </a:t>
+                      </a:r>
+                      <a:endParaRPr lang="en-US" altLang="zh-CN" sz="1400">
+                        <a:latin typeface="Times New Roman" panose="02020603050405020304" charset="0"/>
+                        <a:ea typeface="Google Sans Text"/>
+                        <a:cs typeface="Times New Roman" panose="02020603050405020304" charset="0"/>
+                      </a:endParaRPr>
+                    </a:p>
+                  </a:txBody>
+                  <a:tcPr marL="0" marR="0" marT="0" marB="0" anchor="ctr" anchorCtr="0">
+                    <a:lnL w="6350" cap="flat" cmpd="sng">
+                      <a:solidFill>
+                        <a:srgbClr val="000000"/>
+                      </a:solidFill>
+                      <a:prstDash val="solid"/>
+                      <a:headEnd type="none" w="med" len="med"/>
+                      <a:tailEnd type="none" w="med" len="med"/>
+                    </a:lnL>
+                    <a:lnR w="6350" cap="flat" cmpd="sng">
+                      <a:solidFill>
+                        <a:srgbClr val="000000"/>
+                      </a:solidFill>
+                      <a:prstDash val="solid"/>
+                      <a:headEnd type="none" w="med" len="med"/>
+                      <a:tailEnd type="none" w="med" len="med"/>
+                    </a:lnR>
+                    <a:lnT w="6350" cap="flat" cmpd="sng">
+                      <a:solidFill>
+                        <a:srgbClr val="000000"/>
+                      </a:solidFill>
+                      <a:prstDash val="solid"/>
+                      <a:headEnd type="none" w="med" len="med"/>
+                      <a:tailEnd type="none" w="med" len="med"/>
+                    </a:lnT>
+                    <a:lnB w="6350" cap="flat" cmpd="sng">
+                      <a:solidFill>
+                        <a:srgbClr val="000000"/>
+                      </a:solidFill>
+                      <a:prstDash val="solid"/>
+                      <a:headEnd type="none" w="med" len="med"/>
+                      <a:tailEnd type="none" w="med" len="med"/>
+                    </a:lnB>
+                    <a:noFill/>
+                  </a:tcPr>
+                </a:tc>
+              </a:tr>
+              <a:tr h="569595">
+                <a:tc>
+                  <a:txBody>
+                    <a:bodyPr/>
+                    <a:p>
+                      <a:pPr>
+                        <a:spcBef>
+                          <a:spcPct val="0"/>
+                        </a:spcBef>
+                      </a:pPr>
+                      <a:r>
+                        <a:rPr lang="en-US" altLang="zh-CN" sz="1400" b="1">
+                          <a:latin typeface="Times New Roman" panose="02020603050405020304" charset="0"/>
+                          <a:ea typeface="Google Sans Text"/>
+                          <a:cs typeface="Times New Roman" panose="02020603050405020304" charset="0"/>
+                        </a:rPr>
+                        <a:t>Department</a:t>
+                      </a:r>
+                      <a:endParaRPr lang="en-US" altLang="zh-CN" sz="1400" b="1">
+                        <a:latin typeface="Times New Roman" panose="02020603050405020304" charset="0"/>
+                        <a:ea typeface="Google Sans Text"/>
+                        <a:cs typeface="Times New Roman" panose="02020603050405020304" charset="0"/>
+                      </a:endParaRPr>
+                    </a:p>
+                  </a:txBody>
+                  <a:tcPr marL="0" marR="0" marT="0" marB="0" anchor="ctr" anchorCtr="0">
+                    <a:lnL w="6350" cap="flat" cmpd="sng">
+                      <a:solidFill>
+                        <a:srgbClr val="000000"/>
+                      </a:solidFill>
+                      <a:prstDash val="solid"/>
+                      <a:headEnd type="none" w="med" len="med"/>
+                      <a:tailEnd type="none" w="med" len="med"/>
+                    </a:lnL>
+                    <a:lnR w="6350" cap="flat" cmpd="sng">
+                      <a:solidFill>
+                        <a:srgbClr val="000000"/>
+                      </a:solidFill>
+                      <a:prstDash val="solid"/>
+                      <a:headEnd type="none" w="med" len="med"/>
+                      <a:tailEnd type="none" w="med" len="med"/>
+                    </a:lnR>
+                    <a:lnT w="6350" cap="flat" cmpd="sng">
+                      <a:solidFill>
+                        <a:srgbClr val="000000"/>
+                      </a:solidFill>
+                      <a:prstDash val="solid"/>
+                      <a:headEnd type="none" w="med" len="med"/>
+                      <a:tailEnd type="none" w="med" len="med"/>
+                    </a:lnT>
+                    <a:lnB w="6350" cap="flat" cmpd="sng">
+                      <a:solidFill>
+                        <a:srgbClr val="000000"/>
+                      </a:solidFill>
+                      <a:prstDash val="solid"/>
+                      <a:headEnd type="none" w="med" len="med"/>
+                      <a:tailEnd type="none" w="med" len="med"/>
+                    </a:lnB>
+                    <a:noFill/>
+                  </a:tcPr>
+                </a:tc>
+                <a:tc>
+                  <a:txBody>
+                    <a:bodyPr/>
+                    <a:p>
+                      <a:pPr>
+                        <a:spcBef>
+                          <a:spcPct val="0"/>
+                        </a:spcBef>
+                      </a:pPr>
+                      <a:r>
+                        <a:rPr lang="en-US" altLang="zh-CN" sz="1400" b="1">
+                          <a:latin typeface="Times New Roman" panose="02020603050405020304" charset="0"/>
+                          <a:ea typeface="Google Sans Text"/>
+                          <a:cs typeface="Times New Roman" panose="02020603050405020304" charset="0"/>
+                        </a:rPr>
+                        <a:t>dept_id</a:t>
+                      </a:r>
+                      <a:r>
+                        <a:rPr lang="en-US" altLang="zh-CN" sz="1400">
+                          <a:latin typeface="Times New Roman" panose="02020603050405020304" charset="0"/>
+                          <a:ea typeface="Google Sans Text"/>
+                          <a:cs typeface="Times New Roman" panose="02020603050405020304" charset="0"/>
+                        </a:rPr>
+                        <a:t>, dept_name, location</a:t>
+                      </a:r>
+                      <a:endParaRPr lang="en-US" altLang="zh-CN" sz="1400">
+                        <a:latin typeface="Times New Roman" panose="02020603050405020304" charset="0"/>
+                        <a:ea typeface="Google Sans Text"/>
+                        <a:cs typeface="Times New Roman" panose="02020603050405020304" charset="0"/>
+                      </a:endParaRPr>
+                    </a:p>
+                  </a:txBody>
+                  <a:tcPr marL="0" marR="0" marT="0" marB="0" anchor="ctr" anchorCtr="0">
+                    <a:lnL w="6350" cap="flat" cmpd="sng">
+                      <a:solidFill>
+                        <a:srgbClr val="000000"/>
+                      </a:solidFill>
+                      <a:prstDash val="solid"/>
+                      <a:headEnd type="none" w="med" len="med"/>
+                      <a:tailEnd type="none" w="med" len="med"/>
+                    </a:lnL>
+                    <a:lnR w="6350" cap="flat" cmpd="sng">
+                      <a:solidFill>
+                        <a:srgbClr val="000000"/>
+                      </a:solidFill>
+                      <a:prstDash val="solid"/>
+                      <a:headEnd type="none" w="med" len="med"/>
+                      <a:tailEnd type="none" w="med" len="med"/>
+                    </a:lnR>
+                    <a:lnT w="6350" cap="flat" cmpd="sng">
+                      <a:solidFill>
+                        <a:srgbClr val="000000"/>
+                      </a:solidFill>
+                      <a:prstDash val="solid"/>
+                      <a:headEnd type="none" w="med" len="med"/>
+                      <a:tailEnd type="none" w="med" len="med"/>
+                    </a:lnT>
+                    <a:lnB w="6350" cap="flat" cmpd="sng">
+                      <a:solidFill>
+                        <a:srgbClr val="000000"/>
+                      </a:solidFill>
+                      <a:prstDash val="solid"/>
+                      <a:headEnd type="none" w="med" len="med"/>
+                      <a:tailEnd type="none" w="med" len="med"/>
+                    </a:lnB>
+                    <a:noFill/>
+                  </a:tcPr>
+                </a:tc>
+                <a:tc>
+                  <a:txBody>
+                    <a:bodyPr/>
+                    <a:p>
+                      <a:pPr>
+                        <a:spcBef>
+                          <a:spcPct val="0"/>
+                        </a:spcBef>
+                      </a:pPr>
+                      <a:r>
+                        <a:rPr lang="en-US" altLang="zh-CN" sz="1400">
+                          <a:latin typeface="Times New Roman" panose="02020603050405020304" charset="0"/>
+                          <a:ea typeface="Google Sans Text"/>
+                          <a:cs typeface="Times New Roman" panose="02020603050405020304" charset="0"/>
+                        </a:rPr>
+                        <a:t>Stores organizational structure details.</a:t>
+                      </a:r>
+                      <a:endParaRPr lang="en-US" altLang="zh-CN" sz="1400">
+                        <a:latin typeface="Times New Roman" panose="02020603050405020304" charset="0"/>
+                        <a:ea typeface="Google Sans Text"/>
+                        <a:cs typeface="Times New Roman" panose="02020603050405020304" charset="0"/>
+                      </a:endParaRPr>
+                    </a:p>
+                  </a:txBody>
+                  <a:tcPr marL="0" marR="0" marT="0" marB="0" anchor="ctr" anchorCtr="0">
+                    <a:lnL w="6350" cap="flat" cmpd="sng">
+                      <a:solidFill>
+                        <a:srgbClr val="000000"/>
+                      </a:solidFill>
+                      <a:prstDash val="solid"/>
+                      <a:headEnd type="none" w="med" len="med"/>
+                      <a:tailEnd type="none" w="med" len="med"/>
+                    </a:lnL>
+                    <a:lnR w="6350" cap="flat" cmpd="sng">
+                      <a:solidFill>
+                        <a:srgbClr val="000000"/>
+                      </a:solidFill>
+                      <a:prstDash val="solid"/>
+                      <a:headEnd type="none" w="med" len="med"/>
+                      <a:tailEnd type="none" w="med" len="med"/>
+                    </a:lnR>
+                    <a:lnT w="6350" cap="flat" cmpd="sng">
+                      <a:solidFill>
+                        <a:srgbClr val="000000"/>
+                      </a:solidFill>
+                      <a:prstDash val="solid"/>
+                      <a:headEnd type="none" w="med" len="med"/>
+                      <a:tailEnd type="none" w="med" len="med"/>
+                    </a:lnT>
+                    <a:lnB w="6350" cap="flat" cmpd="sng">
+                      <a:solidFill>
+                        <a:srgbClr val="000000"/>
+                      </a:solidFill>
+                      <a:prstDash val="solid"/>
+                      <a:headEnd type="none" w="med" len="med"/>
+                      <a:tailEnd type="none" w="med" len="med"/>
+                    </a:lnB>
+                    <a:noFill/>
+                  </a:tcPr>
+                </a:tc>
+              </a:tr>
+              <a:tr h="854075">
+                <a:tc>
+                  <a:txBody>
+                    <a:bodyPr/>
+                    <a:p>
+                      <a:pPr>
+                        <a:spcBef>
+                          <a:spcPct val="0"/>
+                        </a:spcBef>
+                      </a:pPr>
+                      <a:r>
+                        <a:rPr lang="en-US" altLang="zh-CN" sz="1400" b="1">
+                          <a:latin typeface="Times New Roman" panose="02020603050405020304" charset="0"/>
+                          <a:ea typeface="Google Sans Text"/>
+                          <a:cs typeface="Times New Roman" panose="02020603050405020304" charset="0"/>
+                        </a:rPr>
+                        <a:t>Employee</a:t>
+                      </a:r>
+                      <a:endParaRPr lang="en-US" altLang="zh-CN" sz="1400" b="1">
+                        <a:latin typeface="Times New Roman" panose="02020603050405020304" charset="0"/>
+                        <a:ea typeface="Google Sans Text"/>
+                        <a:cs typeface="Times New Roman" panose="02020603050405020304" charset="0"/>
+                      </a:endParaRPr>
+                    </a:p>
+                  </a:txBody>
+                  <a:tcPr marL="0" marR="0" marT="0" marB="0" anchor="ctr" anchorCtr="0">
+                    <a:lnL w="6350" cap="flat" cmpd="sng">
+                      <a:solidFill>
+                        <a:srgbClr val="000000"/>
+                      </a:solidFill>
+                      <a:prstDash val="solid"/>
+                      <a:headEnd type="none" w="med" len="med"/>
+                      <a:tailEnd type="none" w="med" len="med"/>
+                    </a:lnL>
+                    <a:lnR w="6350" cap="flat" cmpd="sng">
+                      <a:solidFill>
+                        <a:srgbClr val="000000"/>
+                      </a:solidFill>
+                      <a:prstDash val="solid"/>
+                      <a:headEnd type="none" w="med" len="med"/>
+                      <a:tailEnd type="none" w="med" len="med"/>
+                    </a:lnR>
+                    <a:lnT w="6350" cap="flat" cmpd="sng">
+                      <a:solidFill>
+                        <a:srgbClr val="000000"/>
+                      </a:solidFill>
+                      <a:prstDash val="solid"/>
+                      <a:headEnd type="none" w="med" len="med"/>
+                      <a:tailEnd type="none" w="med" len="med"/>
+                    </a:lnT>
+                    <a:lnB w="6350" cap="flat" cmpd="sng">
+                      <a:solidFill>
+                        <a:srgbClr val="000000"/>
+                      </a:solidFill>
+                      <a:prstDash val="solid"/>
+                      <a:headEnd type="none" w="med" len="med"/>
+                      <a:tailEnd type="none" w="med" len="med"/>
+                    </a:lnB>
+                    <a:noFill/>
+                  </a:tcPr>
+                </a:tc>
+                <a:tc>
+                  <a:txBody>
+                    <a:bodyPr/>
+                    <a:p>
+                      <a:pPr>
+                        <a:spcBef>
+                          <a:spcPct val="0"/>
+                        </a:spcBef>
+                      </a:pPr>
+                      <a:r>
+                        <a:rPr lang="en-US" altLang="zh-CN" sz="1400" b="1">
+                          <a:latin typeface="Times New Roman" panose="02020603050405020304" charset="0"/>
+                          <a:ea typeface="Google Sans Text"/>
+                          <a:cs typeface="Times New Roman" panose="02020603050405020304" charset="0"/>
+                        </a:rPr>
+                        <a:t>user_id</a:t>
+                      </a:r>
+                      <a:r>
+                        <a:rPr lang="en-US" altLang="zh-CN" sz="1400">
+                          <a:latin typeface="Times New Roman" panose="02020603050405020304" charset="0"/>
+                          <a:ea typeface="Google Sans Text"/>
+                          <a:cs typeface="Times New Roman" panose="02020603050405020304" charset="0"/>
+                        </a:rPr>
+                        <a:t>, username, password, role, </a:t>
+                      </a:r>
+                      <a:r>
+                        <a:rPr lang="en-US" altLang="zh-CN" sz="1400" i="1">
+                          <a:latin typeface="Times New Roman" panose="02020603050405020304" charset="0"/>
+                          <a:ea typeface="Google Sans Text"/>
+                          <a:cs typeface="Times New Roman" panose="02020603050405020304" charset="0"/>
+                        </a:rPr>
+                        <a:t>dept_id</a:t>
+                      </a:r>
+                      <a:endParaRPr lang="en-US" altLang="zh-CN" sz="1400" i="1">
+                        <a:latin typeface="Times New Roman" panose="02020603050405020304" charset="0"/>
+                        <a:ea typeface="Google Sans Text"/>
+                        <a:cs typeface="Times New Roman" panose="02020603050405020304" charset="0"/>
+                      </a:endParaRPr>
+                    </a:p>
+                  </a:txBody>
+                  <a:tcPr marL="0" marR="0" marT="0" marB="0" anchor="ctr" anchorCtr="0">
+                    <a:lnL w="6350" cap="flat" cmpd="sng">
+                      <a:solidFill>
+                        <a:srgbClr val="000000"/>
+                      </a:solidFill>
+                      <a:prstDash val="solid"/>
+                      <a:headEnd type="none" w="med" len="med"/>
+                      <a:tailEnd type="none" w="med" len="med"/>
+                    </a:lnL>
+                    <a:lnR w="6350" cap="flat" cmpd="sng">
+                      <a:solidFill>
+                        <a:srgbClr val="000000"/>
+                      </a:solidFill>
+                      <a:prstDash val="solid"/>
+                      <a:headEnd type="none" w="med" len="med"/>
+                      <a:tailEnd type="none" w="med" len="med"/>
+                    </a:lnR>
+                    <a:lnT w="6350" cap="flat" cmpd="sng">
+                      <a:solidFill>
+                        <a:srgbClr val="000000"/>
+                      </a:solidFill>
+                      <a:prstDash val="solid"/>
+                      <a:headEnd type="none" w="med" len="med"/>
+                      <a:tailEnd type="none" w="med" len="med"/>
+                    </a:lnT>
+                    <a:lnB w="6350" cap="flat" cmpd="sng">
+                      <a:solidFill>
+                        <a:srgbClr val="000000"/>
+                      </a:solidFill>
+                      <a:prstDash val="solid"/>
+                      <a:headEnd type="none" w="med" len="med"/>
+                      <a:tailEnd type="none" w="med" len="med"/>
+                    </a:lnB>
+                    <a:noFill/>
+                  </a:tcPr>
+                </a:tc>
+                <a:tc>
+                  <a:txBody>
+                    <a:bodyPr/>
+                    <a:p>
+                      <a:pPr>
+                        <a:spcBef>
+                          <a:spcPct val="0"/>
+                        </a:spcBef>
+                      </a:pPr>
+                      <a:r>
+                        <a:rPr lang="en-US" altLang="zh-CN" sz="1400">
+                          <a:latin typeface="Times New Roman" panose="02020603050405020304" charset="0"/>
+                          <a:ea typeface="Google Sans Text"/>
+                          <a:cs typeface="Times New Roman" panose="02020603050405020304" charset="0"/>
+                        </a:rPr>
+                        <a:t>Stores user login credentials and links to a specific Department.</a:t>
+                      </a:r>
+                      <a:endParaRPr lang="en-US" altLang="zh-CN" sz="1400">
+                        <a:latin typeface="Times New Roman" panose="02020603050405020304" charset="0"/>
+                        <a:ea typeface="Google Sans Text"/>
+                        <a:cs typeface="Times New Roman" panose="02020603050405020304" charset="0"/>
+                      </a:endParaRPr>
+                    </a:p>
+                  </a:txBody>
+                  <a:tcPr marL="0" marR="0" marT="0" marB="0" anchor="ctr" anchorCtr="0">
+                    <a:lnL w="6350" cap="flat" cmpd="sng">
+                      <a:solidFill>
+                        <a:srgbClr val="000000"/>
+                      </a:solidFill>
+                      <a:prstDash val="solid"/>
+                      <a:headEnd type="none" w="med" len="med"/>
+                      <a:tailEnd type="none" w="med" len="med"/>
+                    </a:lnL>
+                    <a:lnR w="6350" cap="flat" cmpd="sng">
+                      <a:solidFill>
+                        <a:srgbClr val="000000"/>
+                      </a:solidFill>
+                      <a:prstDash val="solid"/>
+                      <a:headEnd type="none" w="med" len="med"/>
+                      <a:tailEnd type="none" w="med" len="med"/>
+                    </a:lnR>
+                    <a:lnT w="6350" cap="flat" cmpd="sng">
+                      <a:solidFill>
+                        <a:srgbClr val="000000"/>
+                      </a:solidFill>
+                      <a:prstDash val="solid"/>
+                      <a:headEnd type="none" w="med" len="med"/>
+                      <a:tailEnd type="none" w="med" len="med"/>
+                    </a:lnT>
+                    <a:lnB w="6350" cap="flat" cmpd="sng">
+                      <a:solidFill>
+                        <a:srgbClr val="000000"/>
+                      </a:solidFill>
+                      <a:prstDash val="solid"/>
+                      <a:headEnd type="none" w="med" len="med"/>
+                      <a:tailEnd type="none" w="med" len="med"/>
+                    </a:lnB>
+                    <a:noFill/>
+                  </a:tcPr>
+                </a:tc>
+              </a:tr>
+              <a:tr h="1139190">
+                <a:tc>
+                  <a:txBody>
+                    <a:bodyPr/>
+                    <a:p>
+                      <a:pPr>
+                        <a:spcBef>
+                          <a:spcPct val="0"/>
+                        </a:spcBef>
+                      </a:pPr>
+                      <a:r>
+                        <a:rPr lang="en-US" altLang="zh-CN" sz="1400" b="1">
+                          <a:latin typeface="Times New Roman" panose="02020603050405020304" charset="0"/>
+                          <a:ea typeface="Google Sans Text"/>
+                          <a:cs typeface="Times New Roman" panose="02020603050405020304" charset="0"/>
+                        </a:rPr>
+                        <a:t>LeaveRequest</a:t>
+                      </a:r>
+                      <a:endParaRPr lang="en-US" altLang="zh-CN" sz="1400" b="1">
+                        <a:latin typeface="Times New Roman" panose="02020603050405020304" charset="0"/>
+                        <a:ea typeface="Google Sans Text"/>
+                        <a:cs typeface="Times New Roman" panose="02020603050405020304" charset="0"/>
+                      </a:endParaRPr>
+                    </a:p>
+                  </a:txBody>
+                  <a:tcPr marL="0" marR="0" marT="0" marB="0" anchor="ctr" anchorCtr="0">
+                    <a:lnL w="6350" cap="flat" cmpd="sng">
+                      <a:solidFill>
+                        <a:srgbClr val="000000"/>
+                      </a:solidFill>
+                      <a:prstDash val="solid"/>
+                      <a:headEnd type="none" w="med" len="med"/>
+                      <a:tailEnd type="none" w="med" len="med"/>
+                    </a:lnL>
+                    <a:lnR w="6350" cap="flat" cmpd="sng">
+                      <a:solidFill>
+                        <a:srgbClr val="000000"/>
+                      </a:solidFill>
+                      <a:prstDash val="solid"/>
+                      <a:headEnd type="none" w="med" len="med"/>
+                      <a:tailEnd type="none" w="med" len="med"/>
+                    </a:lnR>
+                    <a:lnT w="6350" cap="flat" cmpd="sng">
+                      <a:solidFill>
+                        <a:srgbClr val="000000"/>
+                      </a:solidFill>
+                      <a:prstDash val="solid"/>
+                      <a:headEnd type="none" w="med" len="med"/>
+                      <a:tailEnd type="none" w="med" len="med"/>
+                    </a:lnT>
+                    <a:lnB w="6350" cap="flat" cmpd="sng">
+                      <a:solidFill>
+                        <a:srgbClr val="000000"/>
+                      </a:solidFill>
+                      <a:prstDash val="solid"/>
+                      <a:headEnd type="none" w="med" len="med"/>
+                      <a:tailEnd type="none" w="med" len="med"/>
+                    </a:lnB>
+                    <a:noFill/>
+                  </a:tcPr>
+                </a:tc>
+                <a:tc>
+                  <a:txBody>
+                    <a:bodyPr/>
+                    <a:p>
+                      <a:pPr>
+                        <a:spcBef>
+                          <a:spcPct val="0"/>
+                        </a:spcBef>
+                      </a:pPr>
+                      <a:r>
+                        <a:rPr lang="en-US" altLang="zh-CN" sz="1400" b="1">
+                          <a:latin typeface="Times New Roman" panose="02020603050405020304" charset="0"/>
+                          <a:ea typeface="Google Sans Text"/>
+                          <a:cs typeface="Times New Roman" panose="02020603050405020304" charset="0"/>
+                        </a:rPr>
+                        <a:t>request_id</a:t>
+                      </a:r>
+                      <a:r>
+                        <a:rPr lang="en-US" altLang="zh-CN" sz="1400">
+                          <a:latin typeface="Times New Roman" panose="02020603050405020304" charset="0"/>
+                          <a:ea typeface="Google Sans Text"/>
+                          <a:cs typeface="Times New Roman" panose="02020603050405020304" charset="0"/>
+                        </a:rPr>
+                        <a:t>, start_date, end_date, status, </a:t>
+                      </a:r>
+                      <a:r>
+                        <a:rPr lang="en-US" altLang="zh-CN" sz="1400" i="1">
+                          <a:latin typeface="Times New Roman" panose="02020603050405020304" charset="0"/>
+                          <a:ea typeface="Google Sans Text"/>
+                          <a:cs typeface="Times New Roman" panose="02020603050405020304" charset="0"/>
+                        </a:rPr>
+                        <a:t>user_id</a:t>
+                      </a:r>
+                      <a:endParaRPr lang="en-US" altLang="zh-CN" sz="1400" i="1">
+                        <a:latin typeface="Times New Roman" panose="02020603050405020304" charset="0"/>
+                        <a:ea typeface="Google Sans Text"/>
+                        <a:cs typeface="Times New Roman" panose="02020603050405020304" charset="0"/>
+                      </a:endParaRPr>
+                    </a:p>
+                  </a:txBody>
+                  <a:tcPr marL="0" marR="0" marT="0" marB="0" anchor="ctr" anchorCtr="0">
+                    <a:lnL w="6350" cap="flat" cmpd="sng">
+                      <a:solidFill>
+                        <a:srgbClr val="000000"/>
+                      </a:solidFill>
+                      <a:prstDash val="solid"/>
+                      <a:headEnd type="none" w="med" len="med"/>
+                      <a:tailEnd type="none" w="med" len="med"/>
+                    </a:lnL>
+                    <a:lnR w="6350" cap="flat" cmpd="sng">
+                      <a:solidFill>
+                        <a:srgbClr val="000000"/>
+                      </a:solidFill>
+                      <a:prstDash val="solid"/>
+                      <a:headEnd type="none" w="med" len="med"/>
+                      <a:tailEnd type="none" w="med" len="med"/>
+                    </a:lnR>
+                    <a:lnT w="6350" cap="flat" cmpd="sng">
+                      <a:solidFill>
+                        <a:srgbClr val="000000"/>
+                      </a:solidFill>
+                      <a:prstDash val="solid"/>
+                      <a:headEnd type="none" w="med" len="med"/>
+                      <a:tailEnd type="none" w="med" len="med"/>
+                    </a:lnT>
+                    <a:lnB w="6350" cap="flat" cmpd="sng">
+                      <a:solidFill>
+                        <a:srgbClr val="000000"/>
+                      </a:solidFill>
+                      <a:prstDash val="solid"/>
+                      <a:headEnd type="none" w="med" len="med"/>
+                      <a:tailEnd type="none" w="med" len="med"/>
+                    </a:lnB>
+                    <a:noFill/>
+                  </a:tcPr>
+                </a:tc>
+                <a:tc>
+                  <a:txBody>
+                    <a:bodyPr/>
+                    <a:p>
+                      <a:pPr>
+                        <a:spcBef>
+                          <a:spcPct val="0"/>
+                        </a:spcBef>
+                      </a:pPr>
+                      <a:r>
+                        <a:rPr lang="en-US" altLang="zh-CN" sz="1400">
+                          <a:latin typeface="Times New Roman" panose="02020603050405020304" charset="0"/>
+                          <a:ea typeface="Google Sans Text"/>
+                          <a:cs typeface="Times New Roman" panose="02020603050405020304" charset="0"/>
+                        </a:rPr>
+                        <a:t>Stores leave application details linked to the Employee who submitted it.</a:t>
+                      </a:r>
+                      <a:endParaRPr lang="en-US" altLang="zh-CN" sz="1400">
+                        <a:latin typeface="Times New Roman" panose="02020603050405020304" charset="0"/>
+                        <a:ea typeface="Google Sans Text"/>
+                        <a:cs typeface="Times New Roman" panose="02020603050405020304" charset="0"/>
+                      </a:endParaRPr>
+                    </a:p>
+                  </a:txBody>
+                  <a:tcPr marL="0" marR="0" marT="0" marB="0" anchor="ctr" anchorCtr="0">
+                    <a:lnL w="6350" cap="flat" cmpd="sng">
+                      <a:solidFill>
+                        <a:srgbClr val="000000"/>
+                      </a:solidFill>
+                      <a:prstDash val="solid"/>
+                      <a:headEnd type="none" w="med" len="med"/>
+                      <a:tailEnd type="none" w="med" len="med"/>
+                    </a:lnL>
+                    <a:lnR w="6350" cap="flat" cmpd="sng">
+                      <a:solidFill>
+                        <a:srgbClr val="000000"/>
+                      </a:solidFill>
+                      <a:prstDash val="solid"/>
+                      <a:headEnd type="none" w="med" len="med"/>
+                      <a:tailEnd type="none" w="med" len="med"/>
+                    </a:lnR>
+                    <a:lnT w="6350" cap="flat" cmpd="sng">
+                      <a:solidFill>
+                        <a:srgbClr val="000000"/>
+                      </a:solidFill>
+                      <a:prstDash val="solid"/>
+                      <a:headEnd type="none" w="med" len="med"/>
+                      <a:tailEnd type="none" w="med" len="med"/>
+                    </a:lnT>
+                    <a:lnB w="6350" cap="flat" cmpd="sng">
+                      <a:solidFill>
+                        <a:srgbClr val="000000"/>
+                      </a:solidFill>
+                      <a:prstDash val="solid"/>
+                      <a:headEnd type="none" w="med" len="med"/>
+                      <a:tailEnd type="none" w="med" len="med"/>
+                    </a:lnB>
+                    <a:noFill/>
+                  </a:tcPr>
+                </a:tc>
+              </a:tr>
+              <a:tr h="1138555">
+                <a:tc>
+                  <a:txBody>
+                    <a:bodyPr/>
+                    <a:p>
+                      <a:pPr>
+                        <a:spcBef>
+                          <a:spcPct val="0"/>
+                        </a:spcBef>
+                      </a:pPr>
+                      <a:r>
+                        <a:rPr lang="en-US" altLang="zh-CN" sz="1400" b="1">
+                          <a:latin typeface="Times New Roman" panose="02020603050405020304" charset="0"/>
+                          <a:ea typeface="Google Sans Text"/>
+                          <a:cs typeface="Times New Roman" panose="02020603050405020304" charset="0"/>
+                        </a:rPr>
+                        <a:t>Announcement</a:t>
+                      </a:r>
+                      <a:endParaRPr lang="en-US" altLang="zh-CN" sz="1400" b="1">
+                        <a:latin typeface="Times New Roman" panose="02020603050405020304" charset="0"/>
+                        <a:ea typeface="Google Sans Text"/>
+                        <a:cs typeface="Times New Roman" panose="02020603050405020304" charset="0"/>
+                      </a:endParaRPr>
+                    </a:p>
+                  </a:txBody>
+                  <a:tcPr marL="0" marR="0" marT="0" marB="0" anchor="ctr" anchorCtr="0">
+                    <a:lnL w="6350" cap="flat" cmpd="sng">
+                      <a:solidFill>
+                        <a:srgbClr val="000000"/>
+                      </a:solidFill>
+                      <a:prstDash val="solid"/>
+                      <a:headEnd type="none" w="med" len="med"/>
+                      <a:tailEnd type="none" w="med" len="med"/>
+                    </a:lnL>
+                    <a:lnR w="6350" cap="flat" cmpd="sng">
+                      <a:solidFill>
+                        <a:srgbClr val="000000"/>
+                      </a:solidFill>
+                      <a:prstDash val="solid"/>
+                      <a:headEnd type="none" w="med" len="med"/>
+                      <a:tailEnd type="none" w="med" len="med"/>
+                    </a:lnR>
+                    <a:lnT w="6350" cap="flat" cmpd="sng">
+                      <a:solidFill>
+                        <a:srgbClr val="000000"/>
+                      </a:solidFill>
+                      <a:prstDash val="solid"/>
+                      <a:headEnd type="none" w="med" len="med"/>
+                      <a:tailEnd type="none" w="med" len="med"/>
+                    </a:lnT>
+                    <a:lnB w="6350" cap="flat" cmpd="sng">
+                      <a:solidFill>
+                        <a:srgbClr val="000000"/>
+                      </a:solidFill>
+                      <a:prstDash val="solid"/>
+                      <a:headEnd type="none" w="med" len="med"/>
+                      <a:tailEnd type="none" w="med" len="med"/>
+                    </a:lnB>
+                    <a:noFill/>
+                  </a:tcPr>
+                </a:tc>
+                <a:tc>
+                  <a:txBody>
+                    <a:bodyPr/>
+                    <a:p>
+                      <a:pPr>
+                        <a:spcBef>
+                          <a:spcPct val="0"/>
+                        </a:spcBef>
+                      </a:pPr>
+                      <a:r>
+                        <a:rPr lang="en-US" altLang="zh-CN" sz="1400" b="1">
+                          <a:latin typeface="Times New Roman" panose="02020603050405020304" charset="0"/>
+                          <a:ea typeface="Google Sans Text"/>
+                          <a:cs typeface="Times New Roman" panose="02020603050405020304" charset="0"/>
+                        </a:rPr>
+                        <a:t>notice_id</a:t>
+                      </a:r>
+                      <a:r>
+                        <a:rPr lang="en-US" altLang="zh-CN" sz="1400">
+                          <a:latin typeface="Times New Roman" panose="02020603050405020304" charset="0"/>
+                          <a:ea typeface="Google Sans Text"/>
+                          <a:cs typeface="Times New Roman" panose="02020603050405020304" charset="0"/>
+                        </a:rPr>
+                        <a:t>, title, content, create_time, </a:t>
+                      </a:r>
+                      <a:r>
+                        <a:rPr lang="en-US" altLang="zh-CN" sz="1400" i="1">
+                          <a:latin typeface="Times New Roman" panose="02020603050405020304" charset="0"/>
+                          <a:ea typeface="Google Sans Text"/>
+                          <a:cs typeface="Times New Roman" panose="02020603050405020304" charset="0"/>
+                        </a:rPr>
+                        <a:t>user_id</a:t>
+                      </a:r>
+                      <a:endParaRPr lang="en-US" altLang="zh-CN" sz="1400" i="1">
+                        <a:latin typeface="Times New Roman" panose="02020603050405020304" charset="0"/>
+                        <a:ea typeface="Google Sans Text"/>
+                        <a:cs typeface="Times New Roman" panose="02020603050405020304" charset="0"/>
+                      </a:endParaRPr>
+                    </a:p>
+                  </a:txBody>
+                  <a:tcPr marL="0" marR="0" marT="0" marB="0" anchor="ctr" anchorCtr="0">
+                    <a:lnL w="6350" cap="flat" cmpd="sng">
+                      <a:solidFill>
+                        <a:srgbClr val="000000"/>
+                      </a:solidFill>
+                      <a:prstDash val="solid"/>
+                      <a:headEnd type="none" w="med" len="med"/>
+                      <a:tailEnd type="none" w="med" len="med"/>
+                    </a:lnL>
+                    <a:lnR w="6350" cap="flat" cmpd="sng">
+                      <a:solidFill>
+                        <a:srgbClr val="000000"/>
+                      </a:solidFill>
+                      <a:prstDash val="solid"/>
+                      <a:headEnd type="none" w="med" len="med"/>
+                      <a:tailEnd type="none" w="med" len="med"/>
+                    </a:lnR>
+                    <a:lnT w="6350" cap="flat" cmpd="sng">
+                      <a:solidFill>
+                        <a:srgbClr val="000000"/>
+                      </a:solidFill>
+                      <a:prstDash val="solid"/>
+                      <a:headEnd type="none" w="med" len="med"/>
+                      <a:tailEnd type="none" w="med" len="med"/>
+                    </a:lnT>
+                    <a:lnB w="6350" cap="flat" cmpd="sng">
+                      <a:solidFill>
+                        <a:srgbClr val="000000"/>
+                      </a:solidFill>
+                      <a:prstDash val="solid"/>
+                      <a:headEnd type="none" w="med" len="med"/>
+                      <a:tailEnd type="none" w="med" len="med"/>
+                    </a:lnB>
+                    <a:noFill/>
+                  </a:tcPr>
+                </a:tc>
+                <a:tc>
+                  <a:txBody>
+                    <a:bodyPr/>
+                    <a:p>
+                      <a:pPr>
+                        <a:spcBef>
+                          <a:spcPct val="0"/>
+                        </a:spcBef>
+                      </a:pPr>
+                      <a:r>
+                        <a:rPr lang="en-US" altLang="zh-CN" sz="1400">
+                          <a:latin typeface="Times New Roman" panose="02020603050405020304" charset="0"/>
+                          <a:ea typeface="Google Sans Text"/>
+                          <a:cs typeface="Times New Roman" panose="02020603050405020304" charset="0"/>
+                        </a:rPr>
+                        <a:t>Stores system notifications linked to the Administrator (Employee) who posted them.</a:t>
+                      </a:r>
+                      <a:endParaRPr lang="en-US" altLang="zh-CN" sz="1400">
+                        <a:latin typeface="Times New Roman" panose="02020603050405020304" charset="0"/>
+                        <a:ea typeface="Google Sans Text"/>
+                        <a:cs typeface="Times New Roman" panose="02020603050405020304" charset="0"/>
+                      </a:endParaRPr>
+                    </a:p>
+                  </a:txBody>
+                  <a:tcPr marL="0" marR="0" marT="0" marB="0" anchor="ctr" anchorCtr="0">
+                    <a:lnL w="6350" cap="flat" cmpd="sng">
+                      <a:solidFill>
+                        <a:srgbClr val="000000"/>
+                      </a:solidFill>
+                      <a:prstDash val="solid"/>
+                      <a:headEnd type="none" w="med" len="med"/>
+                      <a:tailEnd type="none" w="med" len="med"/>
+                    </a:lnL>
+                    <a:lnR w="6350" cap="flat" cmpd="sng">
+                      <a:solidFill>
+                        <a:srgbClr val="000000"/>
+                      </a:solidFill>
+                      <a:prstDash val="solid"/>
+                      <a:headEnd type="none" w="med" len="med"/>
+                      <a:tailEnd type="none" w="med" len="med"/>
+                    </a:lnR>
+                    <a:lnT w="6350" cap="flat" cmpd="sng">
+                      <a:solidFill>
+                        <a:srgbClr val="000000"/>
+                      </a:solidFill>
+                      <a:prstDash val="solid"/>
+                      <a:headEnd type="none" w="med" len="med"/>
+                      <a:tailEnd type="none" w="med" len="med"/>
+                    </a:lnT>
+                    <a:lnB w="6350" cap="flat" cmpd="sng">
+                      <a:solidFill>
+                        <a:srgbClr val="000000"/>
+                      </a:solidFill>
+                      <a:prstDash val="solid"/>
+                      <a:headEnd type="none" w="med" len="med"/>
+                      <a:tailEnd type="none" w="med" len="med"/>
+                    </a:lnB>
+                    <a:noFill/>
+                  </a:tcPr>
+                </a:tc>
+              </a:tr>
+            </a:tbl>
+          </a:graphicData>
+        </a:graphic>
+      </p:graphicFrame>
+    </p:spTree>
+    <p:custDataLst>
+      <p:tags r:id="rId3"/>
+    </p:custDataLst>
+  </p:cSld>
+  <p:clrMapOvr>
+    <a:masterClrMapping/>
+  </p:clrMapOvr>
+</p:sld>
+</file>
+
+<file path=ppt/slides/slide6.xml><?xml version="1.0" encoding="utf-8"?>
+<p:sld xmlns:a="http://schemas.openxmlformats.org/drawingml/2006/main" xmlns:r="http://schemas.openxmlformats.org/officeDocument/2006/relationships" xmlns:p="http://schemas.openxmlformats.org/presentationml/2006/main">
+  <p:cSld>
+    <p:spTree>
+      <p:nvGrpSpPr>
+        <p:cNvPr id="1" name=""/>
+        <p:cNvGrpSpPr/>
+        <p:nvPr/>
+      </p:nvGrpSpPr>
+      <p:grpSpPr/>
+      <p:sp>
+        <p:nvSpPr>
+          <p:cNvPr id="2" name="标题 1"/>
+          <p:cNvSpPr>
+            <a:spLocks noGrp="1"/>
+          </p:cNvSpPr>
+          <p:nvPr>
+            <p:ph type="title"/>
+          </p:nvPr>
+        </p:nvSpPr>
+        <p:spPr/>
+        <p:txBody>
+          <a:bodyPr/>
+          <a:p>
+            <a:pPr algn="ctr"/>
+            <a:r>
+              <a:rPr lang="en-US" altLang="zh-CN"/>
+              <a:t>Site Map</a:t>
+            </a:r>
+            <a:endParaRPr lang="en-US" altLang="zh-CN"/>
+          </a:p>
+        </p:txBody>
+      </p:sp>
+      <p:pic>
+        <p:nvPicPr>
+          <p:cNvPr id="4" name="图片 3"/>
+          <p:cNvPicPr>
+            <a:picLocks noChangeAspect="1"/>
+          </p:cNvPicPr>
+          <p:nvPr/>
+        </p:nvPicPr>
+        <p:blipFill>
+          <a:blip r:embed="rId1"/>
+          <a:stretch>
+            <a:fillRect/>
+          </a:stretch>
+        </p:blipFill>
+        <p:spPr>
+          <a:xfrm>
+            <a:off x="949325" y="1239520"/>
+            <a:ext cx="9521190" cy="5342255"/>
+          </a:xfrm>
+          <a:prstGeom prst="rect">
+            <a:avLst/>
+          </a:prstGeom>
+        </p:spPr>
+      </p:pic>
+    </p:spTree>
+    <p:custDataLst>
+      <p:tags r:id="rId2"/>
+    </p:custDataLst>
+  </p:cSld>
+  <p:clrMapOvr>
+    <a:masterClrMapping/>
+  </p:clrMapOvr>
+</p:sld>
+</file>
+
+<file path=ppt/slides/slide7.xml><?xml version="1.0" encoding="utf-8"?>
+<p:sld xmlns:a="http://schemas.openxmlformats.org/drawingml/2006/main" xmlns:r="http://schemas.openxmlformats.org/officeDocument/2006/relationships" xmlns:p="http://schemas.openxmlformats.org/presentationml/2006/main">
+  <p:cSld>
+    <p:spTree>
+      <p:nvGrpSpPr>
+        <p:cNvPr id="1" name=""/>
+        <p:cNvGrpSpPr/>
+        <p:nvPr/>
+      </p:nvGrpSpPr>
+      <p:grpSpPr/>
+      <p:sp>
+        <p:nvSpPr>
+          <p:cNvPr id="2" name="标题 1"/>
+          <p:cNvSpPr>
+            <a:spLocks noGrp="1"/>
+          </p:cNvSpPr>
+          <p:nvPr>
+            <p:ph type="title"/>
+          </p:nvPr>
+        </p:nvSpPr>
+        <p:spPr/>
+        <p:txBody>
+          <a:bodyPr/>
+          <a:p>
+            <a:r>
+              <a:rPr lang="en-US" altLang="zh-CN"/>
+              <a:t>Wireframes</a:t>
+            </a:r>
+            <a:r>
+              <a:rPr lang="zh-CN" altLang="en-US"/>
+              <a:t>（</a:t>
+            </a:r>
+            <a:r>
+              <a:rPr lang="en-US" altLang="zh-CN"/>
+              <a:t>Login Page</a:t>
+            </a:r>
+            <a:r>
+              <a:rPr lang="zh-CN" altLang="en-US"/>
+              <a:t>）</a:t>
+            </a:r>
+            <a:endParaRPr lang="zh-CN" altLang="en-US"/>
+          </a:p>
+        </p:txBody>
+      </p:sp>
+    </p:spTree>
+    <p:custDataLst>
+      <p:tags r:id="rId1"/>
+    </p:custDataLst>
+  </p:cSld>
+  <p:clrMapOvr>
+    <a:masterClrMapping/>
+  </p:clrMapOvr>
+</p:sld>
+</file>
+
+<file path=ppt/slides/slide8.xml><?xml version="1.0" encoding="utf-8"?>
+<p:sld xmlns:a="http://schemas.openxmlformats.org/drawingml/2006/main" xmlns:r="http://schemas.openxmlformats.org/officeDocument/2006/relationships" xmlns:p="http://schemas.openxmlformats.org/presentationml/2006/main">
+  <p:cSld>
+    <p:spTree>
+      <p:nvGrpSpPr>
+        <p:cNvPr id="1" name=""/>
+        <p:cNvGrpSpPr/>
+        <p:nvPr/>
+      </p:nvGrpSpPr>
+      <p:grpSpPr/>
+      <p:sp>
+        <p:nvSpPr>
+          <p:cNvPr id="2" name="标题 1"/>
+          <p:cNvSpPr>
+            <a:spLocks noGrp="1"/>
+          </p:cNvSpPr>
+          <p:nvPr>
+            <p:ph type="title"/>
+          </p:nvPr>
+        </p:nvSpPr>
+        <p:spPr/>
+        <p:txBody>
+          <a:bodyPr/>
+          <a:p>
+            <a:r>
+              <a:rPr lang="en-US" altLang="zh-CN"/>
+              <a:t>Wireframes</a:t>
+            </a:r>
+            <a:r>
+              <a:rPr lang="zh-CN" altLang="en-US"/>
+              <a:t>（</a:t>
+            </a:r>
+            <a:r>
+              <a:rPr lang="en-US" altLang="zh-CN"/>
+              <a:t>Dashboard</a:t>
+            </a:r>
+            <a:r>
+              <a:rPr lang="zh-CN" altLang="en-US"/>
+              <a:t>）</a:t>
+            </a:r>
+            <a:endParaRPr lang="zh-CN" altLang="en-US"/>
+          </a:p>
+        </p:txBody>
+      </p:sp>
+    </p:spTree>
+    <p:custDataLst>
+      <p:tags r:id="rId1"/>
+    </p:custDataLst>
+  </p:cSld>
+  <p:clrMapOvr>
+    <a:masterClrMapping/>
+  </p:clrMapOvr>
+</p:sld>
+</file>
+
+<file path=ppt/slides/slide9.xml><?xml version="1.0" encoding="utf-8"?>
+<p:sld xmlns:a="http://schemas.openxmlformats.org/drawingml/2006/main" xmlns:r="http://schemas.openxmlformats.org/officeDocument/2006/relationships" xmlns:p="http://schemas.openxmlformats.org/presentationml/2006/main">
+  <p:cSld>
+    <p:spTree>
+      <p:nvGrpSpPr>
+        <p:cNvPr id="1" name=""/>
+        <p:cNvGrpSpPr/>
+        <p:nvPr/>
+      </p:nvGrpSpPr>
+      <p:grpSpPr/>
+      <p:sp>
+        <p:nvSpPr>
+          <p:cNvPr id="2" name="标题 1"/>
+          <p:cNvSpPr>
+            <a:spLocks noGrp="1"/>
+          </p:cNvSpPr>
+          <p:nvPr>
+            <p:ph type="title"/>
+          </p:nvPr>
+        </p:nvSpPr>
+        <p:spPr/>
+        <p:txBody>
+          <a:bodyPr/>
+          <a:p>
+            <a:r>
+              <a:rPr lang="en-US" altLang="zh-CN"/>
+              <a:t>Wireframes</a:t>
+            </a:r>
+            <a:r>
+              <a:rPr lang="zh-CN" altLang="en-US"/>
+              <a:t>（</a:t>
+            </a:r>
+            <a:r>
+              <a:rPr lang="en-US" altLang="zh-CN"/>
+              <a:t>Leave Application Form</a:t>
+            </a:r>
+            <a:r>
+              <a:rPr lang="zh-CN" altLang="en-US"/>
+              <a:t>）</a:t>
+            </a:r>
             <a:endParaRPr lang="zh-CN" altLang="en-US"/>
           </a:p>
         </p:txBody>
@@ -5952,6 +8523,84 @@
   <p:tag name="KSO_WM_UNIT_LAYERLEVEL" val="1"/>
   <p:tag name="KSO_WM_TAG_VERSION" val="1.0"/>
   <p:tag name="KSO_WM_BEAUTIFY_FLAG" val="#wm#"/>
+</p:tagLst>
+</file>
+
+<file path=ppt/tags/tag70.xml><?xml version="1.0" encoding="utf-8"?>
+<p:tagLst xmlns:p="http://schemas.openxmlformats.org/presentationml/2006/main">
+  <p:tag name="TABLE_ENDDRAG_ORIGIN_RECT" val="448*358"/>
+  <p:tag name="TABLE_ENDDRAG_RECT" val="444*120*448*358"/>
+</p:tagLst>
+</file>
+
+<file path=ppt/tags/tag71.xml><?xml version="1.0" encoding="utf-8"?>
+<p:tagLst xmlns:p="http://schemas.openxmlformats.org/presentationml/2006/main">
+  <p:tag name="KSO_WM_BEAUTIFY_FLAG" val="#wm#"/>
+  <p:tag name="KSO_WM_TEMPLATE_CATEGORY" val="custom"/>
+  <p:tag name="KSO_WM_TEMPLATE_INDEX" val="20205081"/>
+</p:tagLst>
+</file>
+
+<file path=ppt/tags/tag72.xml><?xml version="1.0" encoding="utf-8"?>
+<p:tagLst xmlns:p="http://schemas.openxmlformats.org/presentationml/2006/main">
+  <p:tag name="KSO_WM_BEAUTIFY_FLAG" val="#wm#"/>
+  <p:tag name="KSO_WM_TEMPLATE_CATEGORY" val="custom"/>
+  <p:tag name="KSO_WM_TEMPLATE_INDEX" val="20205081"/>
+</p:tagLst>
+</file>
+
+<file path=ppt/tags/tag73.xml><?xml version="1.0" encoding="utf-8"?>
+<p:tagLst xmlns:p="http://schemas.openxmlformats.org/presentationml/2006/main">
+  <p:tag name="KSO_WM_BEAUTIFY_FLAG" val="#wm#"/>
+  <p:tag name="KSO_WM_TEMPLATE_CATEGORY" val="custom"/>
+  <p:tag name="KSO_WM_TEMPLATE_INDEX" val="20205081"/>
+</p:tagLst>
+</file>
+
+<file path=ppt/tags/tag74.xml><?xml version="1.0" encoding="utf-8"?>
+<p:tagLst xmlns:p="http://schemas.openxmlformats.org/presentationml/2006/main">
+  <p:tag name="KSO_WM_BEAUTIFY_FLAG" val="#wm#"/>
+  <p:tag name="KSO_WM_TEMPLATE_CATEGORY" val="custom"/>
+  <p:tag name="KSO_WM_TEMPLATE_INDEX" val="20205081"/>
+</p:tagLst>
+</file>
+
+<file path=ppt/tags/tag75.xml><?xml version="1.0" encoding="utf-8"?>
+<p:tagLst xmlns:p="http://schemas.openxmlformats.org/presentationml/2006/main">
+  <p:tag name="KSO_WM_BEAUTIFY_FLAG" val="#wm#"/>
+  <p:tag name="KSO_WM_TEMPLATE_CATEGORY" val="custom"/>
+  <p:tag name="KSO_WM_TEMPLATE_INDEX" val="20205081"/>
+</p:tagLst>
+</file>
+
+<file path=ppt/tags/tag76.xml><?xml version="1.0" encoding="utf-8"?>
+<p:tagLst xmlns:p="http://schemas.openxmlformats.org/presentationml/2006/main">
+  <p:tag name="KSO_WM_BEAUTIFY_FLAG" val="#wm#"/>
+  <p:tag name="KSO_WM_TEMPLATE_CATEGORY" val="custom"/>
+  <p:tag name="KSO_WM_TEMPLATE_INDEX" val="20205081"/>
+</p:tagLst>
+</file>
+
+<file path=ppt/tags/tag77.xml><?xml version="1.0" encoding="utf-8"?>
+<p:tagLst xmlns:p="http://schemas.openxmlformats.org/presentationml/2006/main">
+  <p:tag name="KSO_WM_BEAUTIFY_FLAG" val="#wm#"/>
+  <p:tag name="KSO_WM_TEMPLATE_CATEGORY" val="custom"/>
+  <p:tag name="KSO_WM_TEMPLATE_INDEX" val="20205081"/>
+</p:tagLst>
+</file>
+
+<file path=ppt/tags/tag78.xml><?xml version="1.0" encoding="utf-8"?>
+<p:tagLst xmlns:p="http://schemas.openxmlformats.org/presentationml/2006/main">
+  <p:tag name="TABLE_ENDDRAG_ORIGIN_RECT" val="825*133"/>
+  <p:tag name="TABLE_ENDDRAG_RECT" val="67*153*825*133"/>
+</p:tagLst>
+</file>
+
+<file path=ppt/tags/tag79.xml><?xml version="1.0" encoding="utf-8"?>
+<p:tagLst xmlns:p="http://schemas.openxmlformats.org/presentationml/2006/main">
+  <p:tag name="KSO_WM_BEAUTIFY_FLAG" val="#wm#"/>
+  <p:tag name="KSO_WM_TEMPLATE_CATEGORY" val="custom"/>
+  <p:tag name="KSO_WM_TEMPLATE_INDEX" val="20205081"/>
 </p:tagLst>
 </file>
 
